--- a/kaplan_figures.pptx
+++ b/kaplan_figures.pptx
@@ -5,11 +5,13 @@
     <p:sldMasterId id="2147483648" r:id="rId1"/>
   </p:sldMasterIdLst>
   <p:notesMasterIdLst>
-    <p:notesMasterId r:id="rId4"/>
+    <p:notesMasterId r:id="rId6"/>
   </p:notesMasterIdLst>
   <p:sldIdLst>
     <p:sldId id="260" r:id="rId2"/>
     <p:sldId id="261" r:id="rId3"/>
+    <p:sldId id="262" r:id="rId4"/>
+    <p:sldId id="263" r:id="rId5"/>
   </p:sldIdLst>
   <p:sldSz cx="12192000" cy="6858000"/>
   <p:notesSz cx="6858000" cy="9144000"/>
@@ -198,7 +200,7 @@
           <a:p>
             <a:fld id="{A5D3A342-95BC-3847-91D3-05C264E31944}" type="datetimeFigureOut">
               <a:rPr lang="en-US" smtClean="0"/>
-              <a:t>5/15/24</a:t>
+              <a:t>5/17/24</a:t>
             </a:fld>
             <a:endParaRPr lang="en-US"/>
           </a:p>
@@ -780,7 +782,7 @@
           <a:p>
             <a:fld id="{7CA427F2-688A-874C-BBD9-E88776030538}" type="datetimeFigureOut">
               <a:rPr lang="en-US" smtClean="0"/>
-              <a:t>5/15/24</a:t>
+              <a:t>5/17/24</a:t>
             </a:fld>
             <a:endParaRPr lang="en-US"/>
           </a:p>
@@ -978,7 +980,7 @@
           <a:p>
             <a:fld id="{7CA427F2-688A-874C-BBD9-E88776030538}" type="datetimeFigureOut">
               <a:rPr lang="en-US" smtClean="0"/>
-              <a:t>5/15/24</a:t>
+              <a:t>5/17/24</a:t>
             </a:fld>
             <a:endParaRPr lang="en-US"/>
           </a:p>
@@ -1186,7 +1188,7 @@
           <a:p>
             <a:fld id="{7CA427F2-688A-874C-BBD9-E88776030538}" type="datetimeFigureOut">
               <a:rPr lang="en-US" smtClean="0"/>
-              <a:t>5/15/24</a:t>
+              <a:t>5/17/24</a:t>
             </a:fld>
             <a:endParaRPr lang="en-US"/>
           </a:p>
@@ -1384,7 +1386,7 @@
           <a:p>
             <a:fld id="{7CA427F2-688A-874C-BBD9-E88776030538}" type="datetimeFigureOut">
               <a:rPr lang="en-US" smtClean="0"/>
-              <a:t>5/15/24</a:t>
+              <a:t>5/17/24</a:t>
             </a:fld>
             <a:endParaRPr lang="en-US"/>
           </a:p>
@@ -1659,7 +1661,7 @@
           <a:p>
             <a:fld id="{7CA427F2-688A-874C-BBD9-E88776030538}" type="datetimeFigureOut">
               <a:rPr lang="en-US" smtClean="0"/>
-              <a:t>5/15/24</a:t>
+              <a:t>5/17/24</a:t>
             </a:fld>
             <a:endParaRPr lang="en-US"/>
           </a:p>
@@ -1924,7 +1926,7 @@
           <a:p>
             <a:fld id="{7CA427F2-688A-874C-BBD9-E88776030538}" type="datetimeFigureOut">
               <a:rPr lang="en-US" smtClean="0"/>
-              <a:t>5/15/24</a:t>
+              <a:t>5/17/24</a:t>
             </a:fld>
             <a:endParaRPr lang="en-US"/>
           </a:p>
@@ -2336,7 +2338,7 @@
           <a:p>
             <a:fld id="{7CA427F2-688A-874C-BBD9-E88776030538}" type="datetimeFigureOut">
               <a:rPr lang="en-US" smtClean="0"/>
-              <a:t>5/15/24</a:t>
+              <a:t>5/17/24</a:t>
             </a:fld>
             <a:endParaRPr lang="en-US"/>
           </a:p>
@@ -2477,7 +2479,7 @@
           <a:p>
             <a:fld id="{7CA427F2-688A-874C-BBD9-E88776030538}" type="datetimeFigureOut">
               <a:rPr lang="en-US" smtClean="0"/>
-              <a:t>5/15/24</a:t>
+              <a:t>5/17/24</a:t>
             </a:fld>
             <a:endParaRPr lang="en-US"/>
           </a:p>
@@ -2590,7 +2592,7 @@
           <a:p>
             <a:fld id="{7CA427F2-688A-874C-BBD9-E88776030538}" type="datetimeFigureOut">
               <a:rPr lang="en-US" smtClean="0"/>
-              <a:t>5/15/24</a:t>
+              <a:t>5/17/24</a:t>
             </a:fld>
             <a:endParaRPr lang="en-US"/>
           </a:p>
@@ -2901,7 +2903,7 @@
           <a:p>
             <a:fld id="{7CA427F2-688A-874C-BBD9-E88776030538}" type="datetimeFigureOut">
               <a:rPr lang="en-US" smtClean="0"/>
-              <a:t>5/15/24</a:t>
+              <a:t>5/17/24</a:t>
             </a:fld>
             <a:endParaRPr lang="en-US"/>
           </a:p>
@@ -3189,7 +3191,7 @@
           <a:p>
             <a:fld id="{7CA427F2-688A-874C-BBD9-E88776030538}" type="datetimeFigureOut">
               <a:rPr lang="en-US" smtClean="0"/>
-              <a:t>5/15/24</a:t>
+              <a:t>5/17/24</a:t>
             </a:fld>
             <a:endParaRPr lang="en-US"/>
           </a:p>
@@ -3430,7 +3432,7 @@
           <a:p>
             <a:fld id="{7CA427F2-688A-874C-BBD9-E88776030538}" type="datetimeFigureOut">
               <a:rPr lang="en-US" smtClean="0"/>
-              <a:t>5/15/24</a:t>
+              <a:t>5/17/24</a:t>
             </a:fld>
             <a:endParaRPr lang="en-US"/>
           </a:p>
@@ -4661,6 +4663,714 @@
     <p:extLst>
       <p:ext uri="{BB962C8B-B14F-4D97-AF65-F5344CB8AC3E}">
         <p14:creationId xmlns:p14="http://schemas.microsoft.com/office/powerpoint/2010/main" val="28578907"/>
+      </p:ext>
+    </p:extLst>
+  </p:cSld>
+  <p:clrMapOvr>
+    <a:masterClrMapping/>
+  </p:clrMapOvr>
+</p:sld>
+</file>
+
+<file path=ppt/slides/slide3.xml><?xml version="1.0" encoding="utf-8"?>
+<p:sld xmlns:a="http://schemas.openxmlformats.org/drawingml/2006/main" xmlns:r="http://schemas.openxmlformats.org/officeDocument/2006/relationships" xmlns:p="http://schemas.openxmlformats.org/presentationml/2006/main">
+  <p:cSld>
+    <p:spTree>
+      <p:nvGrpSpPr>
+        <p:cNvPr id="1" name=""/>
+        <p:cNvGrpSpPr/>
+        <p:nvPr/>
+      </p:nvGrpSpPr>
+      <p:grpSpPr>
+        <a:xfrm>
+          <a:off x="0" y="0"/>
+          <a:ext cx="0" cy="0"/>
+          <a:chOff x="0" y="0"/>
+          <a:chExt cx="0" cy="0"/>
+        </a:xfrm>
+      </p:grpSpPr>
+      <p:sp>
+        <p:nvSpPr>
+          <p:cNvPr id="2" name="Title 1">
+            <a:extLst>
+              <a:ext uri="{FF2B5EF4-FFF2-40B4-BE49-F238E27FC236}">
+                <a16:creationId xmlns:a16="http://schemas.microsoft.com/office/drawing/2014/main" id="{62C2E3AA-F844-EDC0-A15B-D52D87E4633F}"/>
+              </a:ext>
+            </a:extLst>
+          </p:cNvPr>
+          <p:cNvSpPr>
+            <a:spLocks noGrp="1"/>
+          </p:cNvSpPr>
+          <p:nvPr>
+            <p:ph type="title"/>
+          </p:nvPr>
+        </p:nvSpPr>
+        <p:spPr/>
+        <p:txBody>
+          <a:bodyPr/>
+          <a:lstStyle/>
+          <a:p>
+            <a:endParaRPr lang="en-US"/>
+          </a:p>
+        </p:txBody>
+      </p:sp>
+      <p:pic>
+        <p:nvPicPr>
+          <p:cNvPr id="11" name="Content Placeholder 10" descr="A graph of a patient's recovery&#10;&#10;Description automatically generated">
+            <a:extLst>
+              <a:ext uri="{FF2B5EF4-FFF2-40B4-BE49-F238E27FC236}">
+                <a16:creationId xmlns:a16="http://schemas.microsoft.com/office/drawing/2014/main" id="{FB4215CA-F0CF-5BA0-D573-A41D8D2F2793}"/>
+              </a:ext>
+            </a:extLst>
+          </p:cNvPr>
+          <p:cNvPicPr>
+            <a:picLocks noGrp="1" noChangeAspect="1"/>
+          </p:cNvPicPr>
+          <p:nvPr>
+            <p:ph idx="1"/>
+          </p:nvPr>
+        </p:nvPicPr>
+        <p:blipFill>
+          <a:blip r:embed="rId2"/>
+          <a:stretch>
+            <a:fillRect/>
+          </a:stretch>
+        </p:blipFill>
+        <p:spPr>
+          <a:xfrm>
+            <a:off x="2624124" y="3359167"/>
+            <a:ext cx="5248248" cy="3498832"/>
+          </a:xfrm>
+        </p:spPr>
+      </p:pic>
+      <p:pic>
+        <p:nvPicPr>
+          <p:cNvPr id="13" name="Picture 12" descr="A graph of a patient's recovery&#10;&#10;Description automatically generated">
+            <a:extLst>
+              <a:ext uri="{FF2B5EF4-FFF2-40B4-BE49-F238E27FC236}">
+                <a16:creationId xmlns:a16="http://schemas.microsoft.com/office/drawing/2014/main" id="{82E462C3-24ED-60C7-1823-6131251C6FA3}"/>
+              </a:ext>
+            </a:extLst>
+          </p:cNvPr>
+          <p:cNvPicPr>
+            <a:picLocks noChangeAspect="1"/>
+          </p:cNvPicPr>
+          <p:nvPr/>
+        </p:nvPicPr>
+        <p:blipFill>
+          <a:blip r:embed="rId3"/>
+          <a:stretch>
+            <a:fillRect/>
+          </a:stretch>
+        </p:blipFill>
+        <p:spPr>
+          <a:xfrm>
+            <a:off x="5248249" y="1"/>
+            <a:ext cx="5248248" cy="3498832"/>
+          </a:xfrm>
+          <a:prstGeom prst="rect">
+            <a:avLst/>
+          </a:prstGeom>
+        </p:spPr>
+      </p:pic>
+      <p:pic>
+        <p:nvPicPr>
+          <p:cNvPr id="15" name="Picture 14" descr="A graph of a patient's life&#10;&#10;Description automatically generated">
+            <a:extLst>
+              <a:ext uri="{FF2B5EF4-FFF2-40B4-BE49-F238E27FC236}">
+                <a16:creationId xmlns:a16="http://schemas.microsoft.com/office/drawing/2014/main" id="{C0F84139-99A8-5AF5-5B4A-68565EFEC22B}"/>
+              </a:ext>
+            </a:extLst>
+          </p:cNvPr>
+          <p:cNvPicPr>
+            <a:picLocks noChangeAspect="1"/>
+          </p:cNvPicPr>
+          <p:nvPr/>
+        </p:nvPicPr>
+        <p:blipFill>
+          <a:blip r:embed="rId4"/>
+          <a:stretch>
+            <a:fillRect/>
+          </a:stretch>
+        </p:blipFill>
+        <p:spPr>
+          <a:xfrm>
+            <a:off x="0" y="0"/>
+            <a:ext cx="5248248" cy="3498832"/>
+          </a:xfrm>
+          <a:prstGeom prst="rect">
+            <a:avLst/>
+          </a:prstGeom>
+        </p:spPr>
+      </p:pic>
+      <p:sp>
+        <p:nvSpPr>
+          <p:cNvPr id="16" name="TextBox 15">
+            <a:extLst>
+              <a:ext uri="{FF2B5EF4-FFF2-40B4-BE49-F238E27FC236}">
+                <a16:creationId xmlns:a16="http://schemas.microsoft.com/office/drawing/2014/main" id="{7379A7D9-FB7B-E29A-9D0F-D61F09250F66}"/>
+              </a:ext>
+            </a:extLst>
+          </p:cNvPr>
+          <p:cNvSpPr txBox="1"/>
+          <p:nvPr/>
+        </p:nvSpPr>
+        <p:spPr>
+          <a:xfrm>
+            <a:off x="838200" y="2410094"/>
+            <a:ext cx="3030415" cy="369332"/>
+          </a:xfrm>
+          <a:prstGeom prst="rect">
+            <a:avLst/>
+          </a:prstGeom>
+          <a:noFill/>
+        </p:spPr>
+        <p:txBody>
+          <a:bodyPr wrap="square" rtlCol="0">
+            <a:spAutoFit/>
+          </a:bodyPr>
+          <a:lstStyle/>
+          <a:p>
+            <a:r>
+              <a:rPr lang="en-US" dirty="0">
+                <a:solidFill>
+                  <a:srgbClr val="FF0000"/>
+                </a:solidFill>
+              </a:rPr>
+              <a:t>Log-rank p-value &lt; 0.0001*</a:t>
+            </a:r>
+          </a:p>
+        </p:txBody>
+      </p:sp>
+      <p:sp>
+        <p:nvSpPr>
+          <p:cNvPr id="18" name="TextBox 17">
+            <a:extLst>
+              <a:ext uri="{FF2B5EF4-FFF2-40B4-BE49-F238E27FC236}">
+                <a16:creationId xmlns:a16="http://schemas.microsoft.com/office/drawing/2014/main" id="{CFCD0672-6E94-AC43-FAA6-EEB2AC94CE7E}"/>
+              </a:ext>
+            </a:extLst>
+          </p:cNvPr>
+          <p:cNvSpPr txBox="1"/>
+          <p:nvPr/>
+        </p:nvSpPr>
+        <p:spPr>
+          <a:xfrm>
+            <a:off x="6096000" y="2410094"/>
+            <a:ext cx="3030415" cy="369332"/>
+          </a:xfrm>
+          <a:prstGeom prst="rect">
+            <a:avLst/>
+          </a:prstGeom>
+          <a:noFill/>
+        </p:spPr>
+        <p:txBody>
+          <a:bodyPr wrap="square" rtlCol="0">
+            <a:spAutoFit/>
+          </a:bodyPr>
+          <a:lstStyle/>
+          <a:p>
+            <a:r>
+              <a:rPr lang="en-US" dirty="0">
+                <a:solidFill>
+                  <a:srgbClr val="FF0000"/>
+                </a:solidFill>
+              </a:rPr>
+              <a:t>Log-rank p-value = 0.34</a:t>
+            </a:r>
+          </a:p>
+        </p:txBody>
+      </p:sp>
+      <p:sp>
+        <p:nvSpPr>
+          <p:cNvPr id="19" name="TextBox 18">
+            <a:extLst>
+              <a:ext uri="{FF2B5EF4-FFF2-40B4-BE49-F238E27FC236}">
+                <a16:creationId xmlns:a16="http://schemas.microsoft.com/office/drawing/2014/main" id="{8DF3A10A-00A7-9A0F-15BA-07230663E7EF}"/>
+              </a:ext>
+            </a:extLst>
+          </p:cNvPr>
+          <p:cNvSpPr txBox="1"/>
+          <p:nvPr/>
+        </p:nvSpPr>
+        <p:spPr>
+          <a:xfrm>
+            <a:off x="3487615" y="5791509"/>
+            <a:ext cx="3030415" cy="369332"/>
+          </a:xfrm>
+          <a:prstGeom prst="rect">
+            <a:avLst/>
+          </a:prstGeom>
+          <a:noFill/>
+        </p:spPr>
+        <p:txBody>
+          <a:bodyPr wrap="square" rtlCol="0">
+            <a:spAutoFit/>
+          </a:bodyPr>
+          <a:lstStyle/>
+          <a:p>
+            <a:r>
+              <a:rPr lang="en-US" dirty="0">
+                <a:solidFill>
+                  <a:srgbClr val="FF0000"/>
+                </a:solidFill>
+              </a:rPr>
+              <a:t>Log-rank p-value = 0.26</a:t>
+            </a:r>
+          </a:p>
+        </p:txBody>
+      </p:sp>
+      <p:sp>
+        <p:nvSpPr>
+          <p:cNvPr id="20" name="TextBox 19">
+            <a:extLst>
+              <a:ext uri="{FF2B5EF4-FFF2-40B4-BE49-F238E27FC236}">
+                <a16:creationId xmlns:a16="http://schemas.microsoft.com/office/drawing/2014/main" id="{D18885F7-37E0-3B6D-1D43-96DF1BE98782}"/>
+              </a:ext>
+            </a:extLst>
+          </p:cNvPr>
+          <p:cNvSpPr txBox="1"/>
+          <p:nvPr/>
+        </p:nvSpPr>
+        <p:spPr>
+          <a:xfrm>
+            <a:off x="-1" y="2410094"/>
+            <a:ext cx="469232" cy="369332"/>
+          </a:xfrm>
+          <a:prstGeom prst="rect">
+            <a:avLst/>
+          </a:prstGeom>
+          <a:noFill/>
+        </p:spPr>
+        <p:txBody>
+          <a:bodyPr wrap="square" rtlCol="0">
+            <a:spAutoFit/>
+          </a:bodyPr>
+          <a:lstStyle/>
+          <a:p>
+            <a:r>
+              <a:rPr lang="en-US" b="1" dirty="0"/>
+              <a:t>A)</a:t>
+            </a:r>
+          </a:p>
+        </p:txBody>
+      </p:sp>
+      <p:sp>
+        <p:nvSpPr>
+          <p:cNvPr id="21" name="TextBox 20">
+            <a:extLst>
+              <a:ext uri="{FF2B5EF4-FFF2-40B4-BE49-F238E27FC236}">
+                <a16:creationId xmlns:a16="http://schemas.microsoft.com/office/drawing/2014/main" id="{F9D66566-F2D6-73AA-7A15-BBBEB39415A4}"/>
+              </a:ext>
+            </a:extLst>
+          </p:cNvPr>
+          <p:cNvSpPr txBox="1"/>
+          <p:nvPr/>
+        </p:nvSpPr>
+        <p:spPr>
+          <a:xfrm>
+            <a:off x="5248248" y="2410094"/>
+            <a:ext cx="469232" cy="369332"/>
+          </a:xfrm>
+          <a:prstGeom prst="rect">
+            <a:avLst/>
+          </a:prstGeom>
+          <a:noFill/>
+        </p:spPr>
+        <p:txBody>
+          <a:bodyPr wrap="square" rtlCol="0">
+            <a:spAutoFit/>
+          </a:bodyPr>
+          <a:lstStyle/>
+          <a:p>
+            <a:r>
+              <a:rPr lang="en-US" b="1" dirty="0"/>
+              <a:t>B)</a:t>
+            </a:r>
+          </a:p>
+        </p:txBody>
+      </p:sp>
+      <p:sp>
+        <p:nvSpPr>
+          <p:cNvPr id="22" name="TextBox 21">
+            <a:extLst>
+              <a:ext uri="{FF2B5EF4-FFF2-40B4-BE49-F238E27FC236}">
+                <a16:creationId xmlns:a16="http://schemas.microsoft.com/office/drawing/2014/main" id="{E42C8477-5AB6-9B39-3170-75D84ABEA074}"/>
+              </a:ext>
+            </a:extLst>
+          </p:cNvPr>
+          <p:cNvSpPr txBox="1"/>
+          <p:nvPr/>
+        </p:nvSpPr>
+        <p:spPr>
+          <a:xfrm>
+            <a:off x="2389508" y="5976175"/>
+            <a:ext cx="469232" cy="369332"/>
+          </a:xfrm>
+          <a:prstGeom prst="rect">
+            <a:avLst/>
+          </a:prstGeom>
+          <a:noFill/>
+        </p:spPr>
+        <p:txBody>
+          <a:bodyPr wrap="square" rtlCol="0">
+            <a:spAutoFit/>
+          </a:bodyPr>
+          <a:lstStyle/>
+          <a:p>
+            <a:r>
+              <a:rPr lang="en-US" b="1" dirty="0"/>
+              <a:t>C)</a:t>
+            </a:r>
+          </a:p>
+        </p:txBody>
+      </p:sp>
+    </p:spTree>
+    <p:extLst>
+      <p:ext uri="{BB962C8B-B14F-4D97-AF65-F5344CB8AC3E}">
+        <p14:creationId xmlns:p14="http://schemas.microsoft.com/office/powerpoint/2010/main" val="2355214468"/>
+      </p:ext>
+    </p:extLst>
+  </p:cSld>
+  <p:clrMapOvr>
+    <a:masterClrMapping/>
+  </p:clrMapOvr>
+</p:sld>
+</file>
+
+<file path=ppt/slides/slide4.xml><?xml version="1.0" encoding="utf-8"?>
+<p:sld xmlns:a="http://schemas.openxmlformats.org/drawingml/2006/main" xmlns:r="http://schemas.openxmlformats.org/officeDocument/2006/relationships" xmlns:p="http://schemas.openxmlformats.org/presentationml/2006/main">
+  <p:cSld>
+    <p:spTree>
+      <p:nvGrpSpPr>
+        <p:cNvPr id="1" name=""/>
+        <p:cNvGrpSpPr/>
+        <p:nvPr/>
+      </p:nvGrpSpPr>
+      <p:grpSpPr>
+        <a:xfrm>
+          <a:off x="0" y="0"/>
+          <a:ext cx="0" cy="0"/>
+          <a:chOff x="0" y="0"/>
+          <a:chExt cx="0" cy="0"/>
+        </a:xfrm>
+      </p:grpSpPr>
+      <p:pic>
+        <p:nvPicPr>
+          <p:cNvPr id="10" name="Picture 9" descr="A graph of a patient's recovery&#10;&#10;Description automatically generated">
+            <a:extLst>
+              <a:ext uri="{FF2B5EF4-FFF2-40B4-BE49-F238E27FC236}">
+                <a16:creationId xmlns:a16="http://schemas.microsoft.com/office/drawing/2014/main" id="{10DE075E-5C24-604F-F708-A2003C19B0F0}"/>
+              </a:ext>
+            </a:extLst>
+          </p:cNvPr>
+          <p:cNvPicPr>
+            <a:picLocks noChangeAspect="1"/>
+          </p:cNvPicPr>
+          <p:nvPr/>
+        </p:nvPicPr>
+        <p:blipFill>
+          <a:blip r:embed="rId2"/>
+          <a:stretch>
+            <a:fillRect/>
+          </a:stretch>
+        </p:blipFill>
+        <p:spPr>
+          <a:xfrm>
+            <a:off x="2600092" y="3391208"/>
+            <a:ext cx="5200188" cy="3466792"/>
+          </a:xfrm>
+          <a:prstGeom prst="rect">
+            <a:avLst/>
+          </a:prstGeom>
+        </p:spPr>
+      </p:pic>
+      <p:pic>
+        <p:nvPicPr>
+          <p:cNvPr id="8" name="Picture 7" descr="A graph of a patient's survival&#10;&#10;Description automatically generated">
+            <a:extLst>
+              <a:ext uri="{FF2B5EF4-FFF2-40B4-BE49-F238E27FC236}">
+                <a16:creationId xmlns:a16="http://schemas.microsoft.com/office/drawing/2014/main" id="{266643FC-D9B0-AE34-6430-8BA3FC6EF4EE}"/>
+              </a:ext>
+            </a:extLst>
+          </p:cNvPr>
+          <p:cNvPicPr>
+            <a:picLocks noChangeAspect="1"/>
+          </p:cNvPicPr>
+          <p:nvPr/>
+        </p:nvPicPr>
+        <p:blipFill>
+          <a:blip r:embed="rId3"/>
+          <a:stretch>
+            <a:fillRect/>
+          </a:stretch>
+        </p:blipFill>
+        <p:spPr>
+          <a:xfrm>
+            <a:off x="5200187" y="0"/>
+            <a:ext cx="5200189" cy="3466792"/>
+          </a:xfrm>
+          <a:prstGeom prst="rect">
+            <a:avLst/>
+          </a:prstGeom>
+        </p:spPr>
+      </p:pic>
+      <p:pic>
+        <p:nvPicPr>
+          <p:cNvPr id="6" name="Picture 5" descr="A graph of a patient's survival&#10;&#10;Description automatically generated">
+            <a:extLst>
+              <a:ext uri="{FF2B5EF4-FFF2-40B4-BE49-F238E27FC236}">
+                <a16:creationId xmlns:a16="http://schemas.microsoft.com/office/drawing/2014/main" id="{557E4172-1C10-CC40-9DBF-87F4155E6252}"/>
+              </a:ext>
+            </a:extLst>
+          </p:cNvPr>
+          <p:cNvPicPr>
+            <a:picLocks noChangeAspect="1"/>
+          </p:cNvPicPr>
+          <p:nvPr/>
+        </p:nvPicPr>
+        <p:blipFill>
+          <a:blip r:embed="rId4"/>
+          <a:stretch>
+            <a:fillRect/>
+          </a:stretch>
+        </p:blipFill>
+        <p:spPr>
+          <a:xfrm>
+            <a:off x="0" y="0"/>
+            <a:ext cx="5200188" cy="3466792"/>
+          </a:xfrm>
+          <a:prstGeom prst="rect">
+            <a:avLst/>
+          </a:prstGeom>
+        </p:spPr>
+      </p:pic>
+      <p:sp>
+        <p:nvSpPr>
+          <p:cNvPr id="16" name="TextBox 15">
+            <a:extLst>
+              <a:ext uri="{FF2B5EF4-FFF2-40B4-BE49-F238E27FC236}">
+                <a16:creationId xmlns:a16="http://schemas.microsoft.com/office/drawing/2014/main" id="{7379A7D9-FB7B-E29A-9D0F-D61F09250F66}"/>
+              </a:ext>
+            </a:extLst>
+          </p:cNvPr>
+          <p:cNvSpPr txBox="1"/>
+          <p:nvPr/>
+        </p:nvSpPr>
+        <p:spPr>
+          <a:xfrm>
+            <a:off x="838200" y="2410094"/>
+            <a:ext cx="3030415" cy="369332"/>
+          </a:xfrm>
+          <a:prstGeom prst="rect">
+            <a:avLst/>
+          </a:prstGeom>
+          <a:noFill/>
+        </p:spPr>
+        <p:txBody>
+          <a:bodyPr wrap="square" rtlCol="0">
+            <a:spAutoFit/>
+          </a:bodyPr>
+          <a:lstStyle/>
+          <a:p>
+            <a:r>
+              <a:rPr lang="en-US" dirty="0">
+                <a:solidFill>
+                  <a:srgbClr val="FF0000"/>
+                </a:solidFill>
+              </a:rPr>
+              <a:t>Log-rank p-value = 0.38</a:t>
+            </a:r>
+          </a:p>
+        </p:txBody>
+      </p:sp>
+      <p:sp>
+        <p:nvSpPr>
+          <p:cNvPr id="18" name="TextBox 17">
+            <a:extLst>
+              <a:ext uri="{FF2B5EF4-FFF2-40B4-BE49-F238E27FC236}">
+                <a16:creationId xmlns:a16="http://schemas.microsoft.com/office/drawing/2014/main" id="{CFCD0672-6E94-AC43-FAA6-EEB2AC94CE7E}"/>
+              </a:ext>
+            </a:extLst>
+          </p:cNvPr>
+          <p:cNvSpPr txBox="1"/>
+          <p:nvPr/>
+        </p:nvSpPr>
+        <p:spPr>
+          <a:xfrm>
+            <a:off x="6096000" y="2410094"/>
+            <a:ext cx="3030415" cy="369332"/>
+          </a:xfrm>
+          <a:prstGeom prst="rect">
+            <a:avLst/>
+          </a:prstGeom>
+          <a:noFill/>
+        </p:spPr>
+        <p:txBody>
+          <a:bodyPr wrap="square" rtlCol="0">
+            <a:spAutoFit/>
+          </a:bodyPr>
+          <a:lstStyle/>
+          <a:p>
+            <a:r>
+              <a:rPr lang="en-US" dirty="0">
+                <a:solidFill>
+                  <a:srgbClr val="FF0000"/>
+                </a:solidFill>
+              </a:rPr>
+              <a:t>Log-rank p-value = 0.07</a:t>
+            </a:r>
+          </a:p>
+        </p:txBody>
+      </p:sp>
+      <p:sp>
+        <p:nvSpPr>
+          <p:cNvPr id="19" name="TextBox 18">
+            <a:extLst>
+              <a:ext uri="{FF2B5EF4-FFF2-40B4-BE49-F238E27FC236}">
+                <a16:creationId xmlns:a16="http://schemas.microsoft.com/office/drawing/2014/main" id="{8DF3A10A-00A7-9A0F-15BA-07230663E7EF}"/>
+              </a:ext>
+            </a:extLst>
+          </p:cNvPr>
+          <p:cNvSpPr txBox="1"/>
+          <p:nvPr/>
+        </p:nvSpPr>
+        <p:spPr>
+          <a:xfrm>
+            <a:off x="3487615" y="5791509"/>
+            <a:ext cx="3030415" cy="369332"/>
+          </a:xfrm>
+          <a:prstGeom prst="rect">
+            <a:avLst/>
+          </a:prstGeom>
+          <a:noFill/>
+        </p:spPr>
+        <p:txBody>
+          <a:bodyPr wrap="square" rtlCol="0">
+            <a:spAutoFit/>
+          </a:bodyPr>
+          <a:lstStyle/>
+          <a:p>
+            <a:r>
+              <a:rPr lang="en-US" dirty="0">
+                <a:solidFill>
+                  <a:srgbClr val="FF0000"/>
+                </a:solidFill>
+              </a:rPr>
+              <a:t>Log-rank p-value = 0.86</a:t>
+            </a:r>
+          </a:p>
+        </p:txBody>
+      </p:sp>
+      <p:sp>
+        <p:nvSpPr>
+          <p:cNvPr id="20" name="TextBox 19">
+            <a:extLst>
+              <a:ext uri="{FF2B5EF4-FFF2-40B4-BE49-F238E27FC236}">
+                <a16:creationId xmlns:a16="http://schemas.microsoft.com/office/drawing/2014/main" id="{D18885F7-37E0-3B6D-1D43-96DF1BE98782}"/>
+              </a:ext>
+            </a:extLst>
+          </p:cNvPr>
+          <p:cNvSpPr txBox="1"/>
+          <p:nvPr/>
+        </p:nvSpPr>
+        <p:spPr>
+          <a:xfrm>
+            <a:off x="-1" y="2410094"/>
+            <a:ext cx="469232" cy="369332"/>
+          </a:xfrm>
+          <a:prstGeom prst="rect">
+            <a:avLst/>
+          </a:prstGeom>
+          <a:noFill/>
+        </p:spPr>
+        <p:txBody>
+          <a:bodyPr wrap="square" rtlCol="0">
+            <a:spAutoFit/>
+          </a:bodyPr>
+          <a:lstStyle/>
+          <a:p>
+            <a:r>
+              <a:rPr lang="en-US" b="1" dirty="0"/>
+              <a:t>A)</a:t>
+            </a:r>
+          </a:p>
+        </p:txBody>
+      </p:sp>
+      <p:sp>
+        <p:nvSpPr>
+          <p:cNvPr id="21" name="TextBox 20">
+            <a:extLst>
+              <a:ext uri="{FF2B5EF4-FFF2-40B4-BE49-F238E27FC236}">
+                <a16:creationId xmlns:a16="http://schemas.microsoft.com/office/drawing/2014/main" id="{F9D66566-F2D6-73AA-7A15-BBBEB39415A4}"/>
+              </a:ext>
+            </a:extLst>
+          </p:cNvPr>
+          <p:cNvSpPr txBox="1"/>
+          <p:nvPr/>
+        </p:nvSpPr>
+        <p:spPr>
+          <a:xfrm>
+            <a:off x="5248248" y="2410094"/>
+            <a:ext cx="469232" cy="369332"/>
+          </a:xfrm>
+          <a:prstGeom prst="rect">
+            <a:avLst/>
+          </a:prstGeom>
+          <a:noFill/>
+        </p:spPr>
+        <p:txBody>
+          <a:bodyPr wrap="square" rtlCol="0">
+            <a:spAutoFit/>
+          </a:bodyPr>
+          <a:lstStyle/>
+          <a:p>
+            <a:r>
+              <a:rPr lang="en-US" b="1" dirty="0"/>
+              <a:t>B)</a:t>
+            </a:r>
+          </a:p>
+        </p:txBody>
+      </p:sp>
+      <p:sp>
+        <p:nvSpPr>
+          <p:cNvPr id="22" name="TextBox 21">
+            <a:extLst>
+              <a:ext uri="{FF2B5EF4-FFF2-40B4-BE49-F238E27FC236}">
+                <a16:creationId xmlns:a16="http://schemas.microsoft.com/office/drawing/2014/main" id="{E42C8477-5AB6-9B39-3170-75D84ABEA074}"/>
+              </a:ext>
+            </a:extLst>
+          </p:cNvPr>
+          <p:cNvSpPr txBox="1"/>
+          <p:nvPr/>
+        </p:nvSpPr>
+        <p:spPr>
+          <a:xfrm>
+            <a:off x="2389508" y="5976175"/>
+            <a:ext cx="469232" cy="369332"/>
+          </a:xfrm>
+          <a:prstGeom prst="rect">
+            <a:avLst/>
+          </a:prstGeom>
+          <a:noFill/>
+        </p:spPr>
+        <p:txBody>
+          <a:bodyPr wrap="square" rtlCol="0">
+            <a:spAutoFit/>
+          </a:bodyPr>
+          <a:lstStyle/>
+          <a:p>
+            <a:r>
+              <a:rPr lang="en-US" b="1" dirty="0"/>
+              <a:t>C)</a:t>
+            </a:r>
+          </a:p>
+        </p:txBody>
+      </p:sp>
+    </p:spTree>
+    <p:extLst>
+      <p:ext uri="{BB962C8B-B14F-4D97-AF65-F5344CB8AC3E}">
+        <p14:creationId xmlns:p14="http://schemas.microsoft.com/office/powerpoint/2010/main" val="2909437772"/>
       </p:ext>
     </p:extLst>
   </p:cSld>

--- a/kaplan_figures.pptx
+++ b/kaplan_figures.pptx
@@ -5,13 +5,15 @@
     <p:sldMasterId id="2147483648" r:id="rId1"/>
   </p:sldMasterIdLst>
   <p:notesMasterIdLst>
-    <p:notesMasterId r:id="rId6"/>
+    <p:notesMasterId r:id="rId8"/>
   </p:notesMasterIdLst>
   <p:sldIdLst>
     <p:sldId id="260" r:id="rId2"/>
     <p:sldId id="261" r:id="rId3"/>
     <p:sldId id="262" r:id="rId4"/>
     <p:sldId id="263" r:id="rId5"/>
+    <p:sldId id="264" r:id="rId6"/>
+    <p:sldId id="265" r:id="rId7"/>
   </p:sldIdLst>
   <p:sldSz cx="12192000" cy="6858000"/>
   <p:notesSz cx="6858000" cy="9144000"/>
@@ -200,7 +202,7 @@
           <a:p>
             <a:fld id="{A5D3A342-95BC-3847-91D3-05C264E31944}" type="datetimeFigureOut">
               <a:rPr lang="en-US" smtClean="0"/>
-              <a:t>5/17/24</a:t>
+              <a:t>5/19/24</a:t>
             </a:fld>
             <a:endParaRPr lang="en-US"/>
           </a:p>
@@ -782,7 +784,7 @@
           <a:p>
             <a:fld id="{7CA427F2-688A-874C-BBD9-E88776030538}" type="datetimeFigureOut">
               <a:rPr lang="en-US" smtClean="0"/>
-              <a:t>5/17/24</a:t>
+              <a:t>5/19/24</a:t>
             </a:fld>
             <a:endParaRPr lang="en-US"/>
           </a:p>
@@ -980,7 +982,7 @@
           <a:p>
             <a:fld id="{7CA427F2-688A-874C-BBD9-E88776030538}" type="datetimeFigureOut">
               <a:rPr lang="en-US" smtClean="0"/>
-              <a:t>5/17/24</a:t>
+              <a:t>5/19/24</a:t>
             </a:fld>
             <a:endParaRPr lang="en-US"/>
           </a:p>
@@ -1188,7 +1190,7 @@
           <a:p>
             <a:fld id="{7CA427F2-688A-874C-BBD9-E88776030538}" type="datetimeFigureOut">
               <a:rPr lang="en-US" smtClean="0"/>
-              <a:t>5/17/24</a:t>
+              <a:t>5/19/24</a:t>
             </a:fld>
             <a:endParaRPr lang="en-US"/>
           </a:p>
@@ -1386,7 +1388,7 @@
           <a:p>
             <a:fld id="{7CA427F2-688A-874C-BBD9-E88776030538}" type="datetimeFigureOut">
               <a:rPr lang="en-US" smtClean="0"/>
-              <a:t>5/17/24</a:t>
+              <a:t>5/19/24</a:t>
             </a:fld>
             <a:endParaRPr lang="en-US"/>
           </a:p>
@@ -1661,7 +1663,7 @@
           <a:p>
             <a:fld id="{7CA427F2-688A-874C-BBD9-E88776030538}" type="datetimeFigureOut">
               <a:rPr lang="en-US" smtClean="0"/>
-              <a:t>5/17/24</a:t>
+              <a:t>5/19/24</a:t>
             </a:fld>
             <a:endParaRPr lang="en-US"/>
           </a:p>
@@ -1926,7 +1928,7 @@
           <a:p>
             <a:fld id="{7CA427F2-688A-874C-BBD9-E88776030538}" type="datetimeFigureOut">
               <a:rPr lang="en-US" smtClean="0"/>
-              <a:t>5/17/24</a:t>
+              <a:t>5/19/24</a:t>
             </a:fld>
             <a:endParaRPr lang="en-US"/>
           </a:p>
@@ -2338,7 +2340,7 @@
           <a:p>
             <a:fld id="{7CA427F2-688A-874C-BBD9-E88776030538}" type="datetimeFigureOut">
               <a:rPr lang="en-US" smtClean="0"/>
-              <a:t>5/17/24</a:t>
+              <a:t>5/19/24</a:t>
             </a:fld>
             <a:endParaRPr lang="en-US"/>
           </a:p>
@@ -2479,7 +2481,7 @@
           <a:p>
             <a:fld id="{7CA427F2-688A-874C-BBD9-E88776030538}" type="datetimeFigureOut">
               <a:rPr lang="en-US" smtClean="0"/>
-              <a:t>5/17/24</a:t>
+              <a:t>5/19/24</a:t>
             </a:fld>
             <a:endParaRPr lang="en-US"/>
           </a:p>
@@ -2592,7 +2594,7 @@
           <a:p>
             <a:fld id="{7CA427F2-688A-874C-BBD9-E88776030538}" type="datetimeFigureOut">
               <a:rPr lang="en-US" smtClean="0"/>
-              <a:t>5/17/24</a:t>
+              <a:t>5/19/24</a:t>
             </a:fld>
             <a:endParaRPr lang="en-US"/>
           </a:p>
@@ -2903,7 +2905,7 @@
           <a:p>
             <a:fld id="{7CA427F2-688A-874C-BBD9-E88776030538}" type="datetimeFigureOut">
               <a:rPr lang="en-US" smtClean="0"/>
-              <a:t>5/17/24</a:t>
+              <a:t>5/19/24</a:t>
             </a:fld>
             <a:endParaRPr lang="en-US"/>
           </a:p>
@@ -3191,7 +3193,7 @@
           <a:p>
             <a:fld id="{7CA427F2-688A-874C-BBD9-E88776030538}" type="datetimeFigureOut">
               <a:rPr lang="en-US" smtClean="0"/>
-              <a:t>5/17/24</a:t>
+              <a:t>5/19/24</a:t>
             </a:fld>
             <a:endParaRPr lang="en-US"/>
           </a:p>
@@ -3432,7 +3434,7 @@
           <a:p>
             <a:fld id="{7CA427F2-688A-874C-BBD9-E88776030538}" type="datetimeFigureOut">
               <a:rPr lang="en-US" smtClean="0"/>
-              <a:t>5/17/24</a:t>
+              <a:t>5/19/24</a:t>
             </a:fld>
             <a:endParaRPr lang="en-US"/>
           </a:p>
@@ -5371,6 +5373,326 @@
     <p:extLst>
       <p:ext uri="{BB962C8B-B14F-4D97-AF65-F5344CB8AC3E}">
         <p14:creationId xmlns:p14="http://schemas.microsoft.com/office/powerpoint/2010/main" val="2909437772"/>
+      </p:ext>
+    </p:extLst>
+  </p:cSld>
+  <p:clrMapOvr>
+    <a:masterClrMapping/>
+  </p:clrMapOvr>
+</p:sld>
+</file>
+
+<file path=ppt/slides/slide5.xml><?xml version="1.0" encoding="utf-8"?>
+<p:sld xmlns:a="http://schemas.openxmlformats.org/drawingml/2006/main" xmlns:r="http://schemas.openxmlformats.org/officeDocument/2006/relationships" xmlns:p="http://schemas.openxmlformats.org/presentationml/2006/main">
+  <p:cSld>
+    <p:spTree>
+      <p:nvGrpSpPr>
+        <p:cNvPr id="1" name=""/>
+        <p:cNvGrpSpPr/>
+        <p:nvPr/>
+      </p:nvGrpSpPr>
+      <p:grpSpPr>
+        <a:xfrm>
+          <a:off x="0" y="0"/>
+          <a:ext cx="0" cy="0"/>
+          <a:chOff x="0" y="0"/>
+          <a:chExt cx="0" cy="0"/>
+        </a:xfrm>
+      </p:grpSpPr>
+      <p:pic>
+        <p:nvPicPr>
+          <p:cNvPr id="15" name="Picture 14" descr="A graph of a patient's survival&#10;&#10;Description automatically generated">
+            <a:extLst>
+              <a:ext uri="{FF2B5EF4-FFF2-40B4-BE49-F238E27FC236}">
+                <a16:creationId xmlns:a16="http://schemas.microsoft.com/office/drawing/2014/main" id="{CBB9A540-6375-9BF3-7926-4E40BBBD9700}"/>
+              </a:ext>
+            </a:extLst>
+          </p:cNvPr>
+          <p:cNvPicPr>
+            <a:picLocks noChangeAspect="1"/>
+          </p:cNvPicPr>
+          <p:nvPr/>
+        </p:nvPicPr>
+        <p:blipFill>
+          <a:blip r:embed="rId2"/>
+          <a:stretch>
+            <a:fillRect/>
+          </a:stretch>
+        </p:blipFill>
+        <p:spPr>
+          <a:xfrm>
+            <a:off x="6024564" y="0"/>
+            <a:ext cx="6167437" cy="3700462"/>
+          </a:xfrm>
+          <a:prstGeom prst="rect">
+            <a:avLst/>
+          </a:prstGeom>
+        </p:spPr>
+      </p:pic>
+      <p:pic>
+        <p:nvPicPr>
+          <p:cNvPr id="9" name="Picture 8" descr="A graph of different colored lines&#10;&#10;Description automatically generated">
+            <a:extLst>
+              <a:ext uri="{FF2B5EF4-FFF2-40B4-BE49-F238E27FC236}">
+                <a16:creationId xmlns:a16="http://schemas.microsoft.com/office/drawing/2014/main" id="{6AB44898-E549-7FD7-BE70-1DFB87DAC7AF}"/>
+              </a:ext>
+            </a:extLst>
+          </p:cNvPr>
+          <p:cNvPicPr>
+            <a:picLocks noChangeAspect="1"/>
+          </p:cNvPicPr>
+          <p:nvPr/>
+        </p:nvPicPr>
+        <p:blipFill>
+          <a:blip r:embed="rId3"/>
+          <a:stretch>
+            <a:fillRect/>
+          </a:stretch>
+        </p:blipFill>
+        <p:spPr>
+          <a:xfrm>
+            <a:off x="-71437" y="0"/>
+            <a:ext cx="6167437" cy="3700462"/>
+          </a:xfrm>
+          <a:prstGeom prst="rect">
+            <a:avLst/>
+          </a:prstGeom>
+        </p:spPr>
+      </p:pic>
+      <p:sp>
+        <p:nvSpPr>
+          <p:cNvPr id="16" name="TextBox 15">
+            <a:extLst>
+              <a:ext uri="{FF2B5EF4-FFF2-40B4-BE49-F238E27FC236}">
+                <a16:creationId xmlns:a16="http://schemas.microsoft.com/office/drawing/2014/main" id="{68096637-0A7C-4686-5F15-FD8992E37872}"/>
+              </a:ext>
+            </a:extLst>
+          </p:cNvPr>
+          <p:cNvSpPr txBox="1"/>
+          <p:nvPr/>
+        </p:nvSpPr>
+        <p:spPr>
+          <a:xfrm>
+            <a:off x="0" y="3244334"/>
+            <a:ext cx="450575" cy="369332"/>
+          </a:xfrm>
+          <a:prstGeom prst="rect">
+            <a:avLst/>
+          </a:prstGeom>
+          <a:noFill/>
+        </p:spPr>
+        <p:txBody>
+          <a:bodyPr wrap="square" rtlCol="0">
+            <a:spAutoFit/>
+          </a:bodyPr>
+          <a:lstStyle/>
+          <a:p>
+            <a:r>
+              <a:rPr lang="en-US" b="1" dirty="0"/>
+              <a:t>A)</a:t>
+            </a:r>
+          </a:p>
+        </p:txBody>
+      </p:sp>
+      <p:sp>
+        <p:nvSpPr>
+          <p:cNvPr id="17" name="TextBox 16">
+            <a:extLst>
+              <a:ext uri="{FF2B5EF4-FFF2-40B4-BE49-F238E27FC236}">
+                <a16:creationId xmlns:a16="http://schemas.microsoft.com/office/drawing/2014/main" id="{A009FF64-71CD-6792-9D9E-37F0A1C3A928}"/>
+              </a:ext>
+            </a:extLst>
+          </p:cNvPr>
+          <p:cNvSpPr txBox="1"/>
+          <p:nvPr/>
+        </p:nvSpPr>
+        <p:spPr>
+          <a:xfrm>
+            <a:off x="5870712" y="3244334"/>
+            <a:ext cx="450575" cy="369332"/>
+          </a:xfrm>
+          <a:prstGeom prst="rect">
+            <a:avLst/>
+          </a:prstGeom>
+          <a:noFill/>
+        </p:spPr>
+        <p:txBody>
+          <a:bodyPr wrap="square" rtlCol="0">
+            <a:spAutoFit/>
+          </a:bodyPr>
+          <a:lstStyle/>
+          <a:p>
+            <a:r>
+              <a:rPr lang="en-US" b="1" dirty="0"/>
+              <a:t>B)</a:t>
+            </a:r>
+          </a:p>
+        </p:txBody>
+      </p:sp>
+    </p:spTree>
+    <p:extLst>
+      <p:ext uri="{BB962C8B-B14F-4D97-AF65-F5344CB8AC3E}">
+        <p14:creationId xmlns:p14="http://schemas.microsoft.com/office/powerpoint/2010/main" val="2052640013"/>
+      </p:ext>
+    </p:extLst>
+  </p:cSld>
+  <p:clrMapOvr>
+    <a:masterClrMapping/>
+  </p:clrMapOvr>
+</p:sld>
+</file>
+
+<file path=ppt/slides/slide6.xml><?xml version="1.0" encoding="utf-8"?>
+<p:sld xmlns:a="http://schemas.openxmlformats.org/drawingml/2006/main" xmlns:r="http://schemas.openxmlformats.org/officeDocument/2006/relationships" xmlns:p="http://schemas.openxmlformats.org/presentationml/2006/main">
+  <p:cSld>
+    <p:spTree>
+      <p:nvGrpSpPr>
+        <p:cNvPr id="1" name=""/>
+        <p:cNvGrpSpPr/>
+        <p:nvPr/>
+      </p:nvGrpSpPr>
+      <p:grpSpPr>
+        <a:xfrm>
+          <a:off x="0" y="0"/>
+          <a:ext cx="0" cy="0"/>
+          <a:chOff x="0" y="0"/>
+          <a:chExt cx="0" cy="0"/>
+        </a:xfrm>
+      </p:grpSpPr>
+      <p:pic>
+        <p:nvPicPr>
+          <p:cNvPr id="7" name="Picture 6" descr="A graph of a patient's survival&#10;&#10;Description automatically generated">
+            <a:extLst>
+              <a:ext uri="{FF2B5EF4-FFF2-40B4-BE49-F238E27FC236}">
+                <a16:creationId xmlns:a16="http://schemas.microsoft.com/office/drawing/2014/main" id="{5670E6DF-C17A-75C5-4702-A5894F5763D8}"/>
+              </a:ext>
+            </a:extLst>
+          </p:cNvPr>
+          <p:cNvPicPr>
+            <a:picLocks noChangeAspect="1"/>
+          </p:cNvPicPr>
+          <p:nvPr/>
+        </p:nvPicPr>
+        <p:blipFill>
+          <a:blip r:embed="rId2"/>
+          <a:stretch>
+            <a:fillRect/>
+          </a:stretch>
+        </p:blipFill>
+        <p:spPr>
+          <a:xfrm>
+            <a:off x="6144590" y="-14780"/>
+            <a:ext cx="6047410" cy="3628446"/>
+          </a:xfrm>
+          <a:prstGeom prst="rect">
+            <a:avLst/>
+          </a:prstGeom>
+        </p:spPr>
+      </p:pic>
+      <p:pic>
+        <p:nvPicPr>
+          <p:cNvPr id="3" name="Picture 2" descr="A graph of different colored lines&#10;&#10;Description automatically generated">
+            <a:extLst>
+              <a:ext uri="{FF2B5EF4-FFF2-40B4-BE49-F238E27FC236}">
+                <a16:creationId xmlns:a16="http://schemas.microsoft.com/office/drawing/2014/main" id="{368A7A3C-EF37-30D0-5907-79CE6445EF64}"/>
+              </a:ext>
+            </a:extLst>
+          </p:cNvPr>
+          <p:cNvPicPr>
+            <a:picLocks noChangeAspect="1"/>
+          </p:cNvPicPr>
+          <p:nvPr/>
+        </p:nvPicPr>
+        <p:blipFill>
+          <a:blip r:embed="rId3"/>
+          <a:stretch>
+            <a:fillRect/>
+          </a:stretch>
+        </p:blipFill>
+        <p:spPr>
+          <a:xfrm>
+            <a:off x="0" y="0"/>
+            <a:ext cx="6047410" cy="3628446"/>
+          </a:xfrm>
+          <a:prstGeom prst="rect">
+            <a:avLst/>
+          </a:prstGeom>
+        </p:spPr>
+      </p:pic>
+      <p:sp>
+        <p:nvSpPr>
+          <p:cNvPr id="16" name="TextBox 15">
+            <a:extLst>
+              <a:ext uri="{FF2B5EF4-FFF2-40B4-BE49-F238E27FC236}">
+                <a16:creationId xmlns:a16="http://schemas.microsoft.com/office/drawing/2014/main" id="{68096637-0A7C-4686-5F15-FD8992E37872}"/>
+              </a:ext>
+            </a:extLst>
+          </p:cNvPr>
+          <p:cNvSpPr txBox="1"/>
+          <p:nvPr/>
+        </p:nvSpPr>
+        <p:spPr>
+          <a:xfrm>
+            <a:off x="0" y="3244334"/>
+            <a:ext cx="450575" cy="369332"/>
+          </a:xfrm>
+          <a:prstGeom prst="rect">
+            <a:avLst/>
+          </a:prstGeom>
+          <a:noFill/>
+        </p:spPr>
+        <p:txBody>
+          <a:bodyPr wrap="square" rtlCol="0">
+            <a:spAutoFit/>
+          </a:bodyPr>
+          <a:lstStyle/>
+          <a:p>
+            <a:r>
+              <a:rPr lang="en-US" b="1" dirty="0"/>
+              <a:t>A)</a:t>
+            </a:r>
+          </a:p>
+        </p:txBody>
+      </p:sp>
+      <p:sp>
+        <p:nvSpPr>
+          <p:cNvPr id="17" name="TextBox 16">
+            <a:extLst>
+              <a:ext uri="{FF2B5EF4-FFF2-40B4-BE49-F238E27FC236}">
+                <a16:creationId xmlns:a16="http://schemas.microsoft.com/office/drawing/2014/main" id="{A009FF64-71CD-6792-9D9E-37F0A1C3A928}"/>
+              </a:ext>
+            </a:extLst>
+          </p:cNvPr>
+          <p:cNvSpPr txBox="1"/>
+          <p:nvPr/>
+        </p:nvSpPr>
+        <p:spPr>
+          <a:xfrm>
+            <a:off x="5870712" y="3244334"/>
+            <a:ext cx="450575" cy="369332"/>
+          </a:xfrm>
+          <a:prstGeom prst="rect">
+            <a:avLst/>
+          </a:prstGeom>
+          <a:noFill/>
+        </p:spPr>
+        <p:txBody>
+          <a:bodyPr wrap="square" rtlCol="0">
+            <a:spAutoFit/>
+          </a:bodyPr>
+          <a:lstStyle/>
+          <a:p>
+            <a:r>
+              <a:rPr lang="en-US" b="1" dirty="0"/>
+              <a:t>B)</a:t>
+            </a:r>
+          </a:p>
+        </p:txBody>
+      </p:sp>
+    </p:spTree>
+    <p:extLst>
+      <p:ext uri="{BB962C8B-B14F-4D97-AF65-F5344CB8AC3E}">
+        <p14:creationId xmlns:p14="http://schemas.microsoft.com/office/powerpoint/2010/main" val="1440710982"/>
       </p:ext>
     </p:extLst>
   </p:cSld>

--- a/kaplan_figures.pptx
+++ b/kaplan_figures.pptx
@@ -5,7 +5,7 @@
     <p:sldMasterId id="2147483648" r:id="rId1"/>
   </p:sldMasterIdLst>
   <p:notesMasterIdLst>
-    <p:notesMasterId r:id="rId8"/>
+    <p:notesMasterId r:id="rId10"/>
   </p:notesMasterIdLst>
   <p:sldIdLst>
     <p:sldId id="260" r:id="rId2"/>
@@ -14,6 +14,8 @@
     <p:sldId id="263" r:id="rId5"/>
     <p:sldId id="264" r:id="rId6"/>
     <p:sldId id="265" r:id="rId7"/>
+    <p:sldId id="266" r:id="rId8"/>
+    <p:sldId id="268" r:id="rId9"/>
   </p:sldIdLst>
   <p:sldSz cx="12192000" cy="6858000"/>
   <p:notesSz cx="6858000" cy="9144000"/>
@@ -202,7 +204,7 @@
           <a:p>
             <a:fld id="{A5D3A342-95BC-3847-91D3-05C264E31944}" type="datetimeFigureOut">
               <a:rPr lang="en-US" smtClean="0"/>
-              <a:t>5/19/24</a:t>
+              <a:t>6/17/24</a:t>
             </a:fld>
             <a:endParaRPr lang="en-US"/>
           </a:p>
@@ -637,6 +639,174 @@
 </p:notes>
 </file>
 
+<file path=ppt/notesSlides/notesSlide3.xml><?xml version="1.0" encoding="utf-8"?>
+<p:notes xmlns:a="http://schemas.openxmlformats.org/drawingml/2006/main" xmlns:r="http://schemas.openxmlformats.org/officeDocument/2006/relationships" xmlns:p="http://schemas.openxmlformats.org/presentationml/2006/main">
+  <p:cSld>
+    <p:spTree>
+      <p:nvGrpSpPr>
+        <p:cNvPr id="1" name=""/>
+        <p:cNvGrpSpPr/>
+        <p:nvPr/>
+      </p:nvGrpSpPr>
+      <p:grpSpPr>
+        <a:xfrm>
+          <a:off x="0" y="0"/>
+          <a:ext cx="0" cy="0"/>
+          <a:chOff x="0" y="0"/>
+          <a:chExt cx="0" cy="0"/>
+        </a:xfrm>
+      </p:grpSpPr>
+      <p:sp>
+        <p:nvSpPr>
+          <p:cNvPr id="2" name="Slide Image Placeholder 1"/>
+          <p:cNvSpPr>
+            <a:spLocks noGrp="1" noRot="1" noChangeAspect="1"/>
+          </p:cNvSpPr>
+          <p:nvPr>
+            <p:ph type="sldImg"/>
+          </p:nvPr>
+        </p:nvSpPr>
+        <p:spPr/>
+      </p:sp>
+      <p:sp>
+        <p:nvSpPr>
+          <p:cNvPr id="3" name="Notes Placeholder 2"/>
+          <p:cNvSpPr>
+            <a:spLocks noGrp="1"/>
+          </p:cNvSpPr>
+          <p:nvPr>
+            <p:ph type="body" idx="1"/>
+          </p:nvPr>
+        </p:nvSpPr>
+        <p:spPr/>
+        <p:txBody>
+          <a:bodyPr/>
+          <a:lstStyle/>
+          <a:p>
+            <a:endParaRPr lang="en-US" dirty="0"/>
+          </a:p>
+        </p:txBody>
+      </p:sp>
+      <p:sp>
+        <p:nvSpPr>
+          <p:cNvPr id="4" name="Slide Number Placeholder 3"/>
+          <p:cNvSpPr>
+            <a:spLocks noGrp="1"/>
+          </p:cNvSpPr>
+          <p:nvPr>
+            <p:ph type="sldNum" sz="quarter" idx="5"/>
+          </p:nvPr>
+        </p:nvSpPr>
+        <p:spPr/>
+        <p:txBody>
+          <a:bodyPr/>
+          <a:lstStyle/>
+          <a:p>
+            <a:fld id="{BBEF0392-B3C5-4140-8C6E-A3DD8644D2A4}" type="slidenum">
+              <a:rPr lang="en-US" smtClean="0"/>
+              <a:t>7</a:t>
+            </a:fld>
+            <a:endParaRPr lang="en-US"/>
+          </a:p>
+        </p:txBody>
+      </p:sp>
+    </p:spTree>
+    <p:extLst>
+      <p:ext uri="{BB962C8B-B14F-4D97-AF65-F5344CB8AC3E}">
+        <p14:creationId xmlns:p14="http://schemas.microsoft.com/office/powerpoint/2010/main" val="2100668915"/>
+      </p:ext>
+    </p:extLst>
+  </p:cSld>
+  <p:clrMapOvr>
+    <a:masterClrMapping/>
+  </p:clrMapOvr>
+</p:notes>
+</file>
+
+<file path=ppt/notesSlides/notesSlide4.xml><?xml version="1.0" encoding="utf-8"?>
+<p:notes xmlns:a="http://schemas.openxmlformats.org/drawingml/2006/main" xmlns:r="http://schemas.openxmlformats.org/officeDocument/2006/relationships" xmlns:p="http://schemas.openxmlformats.org/presentationml/2006/main">
+  <p:cSld>
+    <p:spTree>
+      <p:nvGrpSpPr>
+        <p:cNvPr id="1" name=""/>
+        <p:cNvGrpSpPr/>
+        <p:nvPr/>
+      </p:nvGrpSpPr>
+      <p:grpSpPr>
+        <a:xfrm>
+          <a:off x="0" y="0"/>
+          <a:ext cx="0" cy="0"/>
+          <a:chOff x="0" y="0"/>
+          <a:chExt cx="0" cy="0"/>
+        </a:xfrm>
+      </p:grpSpPr>
+      <p:sp>
+        <p:nvSpPr>
+          <p:cNvPr id="2" name="Slide Image Placeholder 1"/>
+          <p:cNvSpPr>
+            <a:spLocks noGrp="1" noRot="1" noChangeAspect="1"/>
+          </p:cNvSpPr>
+          <p:nvPr>
+            <p:ph type="sldImg"/>
+          </p:nvPr>
+        </p:nvSpPr>
+        <p:spPr/>
+      </p:sp>
+      <p:sp>
+        <p:nvSpPr>
+          <p:cNvPr id="3" name="Notes Placeholder 2"/>
+          <p:cNvSpPr>
+            <a:spLocks noGrp="1"/>
+          </p:cNvSpPr>
+          <p:nvPr>
+            <p:ph type="body" idx="1"/>
+          </p:nvPr>
+        </p:nvSpPr>
+        <p:spPr/>
+        <p:txBody>
+          <a:bodyPr/>
+          <a:lstStyle/>
+          <a:p>
+            <a:endParaRPr lang="en-US" dirty="0"/>
+          </a:p>
+        </p:txBody>
+      </p:sp>
+      <p:sp>
+        <p:nvSpPr>
+          <p:cNvPr id="4" name="Slide Number Placeholder 3"/>
+          <p:cNvSpPr>
+            <a:spLocks noGrp="1"/>
+          </p:cNvSpPr>
+          <p:nvPr>
+            <p:ph type="sldNum" sz="quarter" idx="5"/>
+          </p:nvPr>
+        </p:nvSpPr>
+        <p:spPr/>
+        <p:txBody>
+          <a:bodyPr/>
+          <a:lstStyle/>
+          <a:p>
+            <a:fld id="{BBEF0392-B3C5-4140-8C6E-A3DD8644D2A4}" type="slidenum">
+              <a:rPr lang="en-US" smtClean="0"/>
+              <a:t>8</a:t>
+            </a:fld>
+            <a:endParaRPr lang="en-US"/>
+          </a:p>
+        </p:txBody>
+      </p:sp>
+    </p:spTree>
+    <p:extLst>
+      <p:ext uri="{BB962C8B-B14F-4D97-AF65-F5344CB8AC3E}">
+        <p14:creationId xmlns:p14="http://schemas.microsoft.com/office/powerpoint/2010/main" val="4202004421"/>
+      </p:ext>
+    </p:extLst>
+  </p:cSld>
+  <p:clrMapOvr>
+    <a:masterClrMapping/>
+  </p:clrMapOvr>
+</p:notes>
+</file>
+
 <file path=ppt/slideLayouts/slideLayout1.xml><?xml version="1.0" encoding="utf-8"?>
 <p:sldLayout xmlns:a="http://schemas.openxmlformats.org/drawingml/2006/main" xmlns:r="http://schemas.openxmlformats.org/officeDocument/2006/relationships" xmlns:p="http://schemas.openxmlformats.org/presentationml/2006/main" type="title" preserve="1">
   <p:cSld name="Title Slide">
@@ -784,7 +954,7 @@
           <a:p>
             <a:fld id="{7CA427F2-688A-874C-BBD9-E88776030538}" type="datetimeFigureOut">
               <a:rPr lang="en-US" smtClean="0"/>
-              <a:t>5/19/24</a:t>
+              <a:t>6/17/24</a:t>
             </a:fld>
             <a:endParaRPr lang="en-US"/>
           </a:p>
@@ -982,7 +1152,7 @@
           <a:p>
             <a:fld id="{7CA427F2-688A-874C-BBD9-E88776030538}" type="datetimeFigureOut">
               <a:rPr lang="en-US" smtClean="0"/>
-              <a:t>5/19/24</a:t>
+              <a:t>6/17/24</a:t>
             </a:fld>
             <a:endParaRPr lang="en-US"/>
           </a:p>
@@ -1190,7 +1360,7 @@
           <a:p>
             <a:fld id="{7CA427F2-688A-874C-BBD9-E88776030538}" type="datetimeFigureOut">
               <a:rPr lang="en-US" smtClean="0"/>
-              <a:t>5/19/24</a:t>
+              <a:t>6/17/24</a:t>
             </a:fld>
             <a:endParaRPr lang="en-US"/>
           </a:p>
@@ -1388,7 +1558,7 @@
           <a:p>
             <a:fld id="{7CA427F2-688A-874C-BBD9-E88776030538}" type="datetimeFigureOut">
               <a:rPr lang="en-US" smtClean="0"/>
-              <a:t>5/19/24</a:t>
+              <a:t>6/17/24</a:t>
             </a:fld>
             <a:endParaRPr lang="en-US"/>
           </a:p>
@@ -1663,7 +1833,7 @@
           <a:p>
             <a:fld id="{7CA427F2-688A-874C-BBD9-E88776030538}" type="datetimeFigureOut">
               <a:rPr lang="en-US" smtClean="0"/>
-              <a:t>5/19/24</a:t>
+              <a:t>6/17/24</a:t>
             </a:fld>
             <a:endParaRPr lang="en-US"/>
           </a:p>
@@ -1928,7 +2098,7 @@
           <a:p>
             <a:fld id="{7CA427F2-688A-874C-BBD9-E88776030538}" type="datetimeFigureOut">
               <a:rPr lang="en-US" smtClean="0"/>
-              <a:t>5/19/24</a:t>
+              <a:t>6/17/24</a:t>
             </a:fld>
             <a:endParaRPr lang="en-US"/>
           </a:p>
@@ -2340,7 +2510,7 @@
           <a:p>
             <a:fld id="{7CA427F2-688A-874C-BBD9-E88776030538}" type="datetimeFigureOut">
               <a:rPr lang="en-US" smtClean="0"/>
-              <a:t>5/19/24</a:t>
+              <a:t>6/17/24</a:t>
             </a:fld>
             <a:endParaRPr lang="en-US"/>
           </a:p>
@@ -2481,7 +2651,7 @@
           <a:p>
             <a:fld id="{7CA427F2-688A-874C-BBD9-E88776030538}" type="datetimeFigureOut">
               <a:rPr lang="en-US" smtClean="0"/>
-              <a:t>5/19/24</a:t>
+              <a:t>6/17/24</a:t>
             </a:fld>
             <a:endParaRPr lang="en-US"/>
           </a:p>
@@ -2594,7 +2764,7 @@
           <a:p>
             <a:fld id="{7CA427F2-688A-874C-BBD9-E88776030538}" type="datetimeFigureOut">
               <a:rPr lang="en-US" smtClean="0"/>
-              <a:t>5/19/24</a:t>
+              <a:t>6/17/24</a:t>
             </a:fld>
             <a:endParaRPr lang="en-US"/>
           </a:p>
@@ -2905,7 +3075,7 @@
           <a:p>
             <a:fld id="{7CA427F2-688A-874C-BBD9-E88776030538}" type="datetimeFigureOut">
               <a:rPr lang="en-US" smtClean="0"/>
-              <a:t>5/19/24</a:t>
+              <a:t>6/17/24</a:t>
             </a:fld>
             <a:endParaRPr lang="en-US"/>
           </a:p>
@@ -3193,7 +3363,7 @@
           <a:p>
             <a:fld id="{7CA427F2-688A-874C-BBD9-E88776030538}" type="datetimeFigureOut">
               <a:rPr lang="en-US" smtClean="0"/>
-              <a:t>5/19/24</a:t>
+              <a:t>6/17/24</a:t>
             </a:fld>
             <a:endParaRPr lang="en-US"/>
           </a:p>
@@ -3434,7 +3604,7 @@
           <a:p>
             <a:fld id="{7CA427F2-688A-874C-BBD9-E88776030538}" type="datetimeFigureOut">
               <a:rPr lang="en-US" smtClean="0"/>
-              <a:t>5/19/24</a:t>
+              <a:t>6/17/24</a:t>
             </a:fld>
             <a:endParaRPr lang="en-US"/>
           </a:p>
@@ -4691,31 +4861,6 @@
           <a:chExt cx="0" cy="0"/>
         </a:xfrm>
       </p:grpSpPr>
-      <p:sp>
-        <p:nvSpPr>
-          <p:cNvPr id="2" name="Title 1">
-            <a:extLst>
-              <a:ext uri="{FF2B5EF4-FFF2-40B4-BE49-F238E27FC236}">
-                <a16:creationId xmlns:a16="http://schemas.microsoft.com/office/drawing/2014/main" id="{62C2E3AA-F844-EDC0-A15B-D52D87E4633F}"/>
-              </a:ext>
-            </a:extLst>
-          </p:cNvPr>
-          <p:cNvSpPr>
-            <a:spLocks noGrp="1"/>
-          </p:cNvSpPr>
-          <p:nvPr>
-            <p:ph type="title"/>
-          </p:nvPr>
-        </p:nvSpPr>
-        <p:spPr/>
-        <p:txBody>
-          <a:bodyPr/>
-          <a:lstStyle/>
-          <a:p>
-            <a:endParaRPr lang="en-US"/>
-          </a:p>
-        </p:txBody>
-      </p:sp>
       <p:pic>
         <p:nvPicPr>
           <p:cNvPr id="11" name="Content Placeholder 10" descr="A graph of a patient's recovery&#10;&#10;Description automatically generated">
@@ -4839,7 +4984,7 @@
                   <a:srgbClr val="FF0000"/>
                 </a:solidFill>
               </a:rPr>
-              <a:t>Log-rank p-value &lt; 0.0001*</a:t>
+              <a:t>Log-rank p-value &lt; 0.001**</a:t>
             </a:r>
           </a:p>
         </p:txBody>
@@ -4952,7 +5097,7 @@
           <a:p>
             <a:r>
               <a:rPr lang="en-US" b="1" dirty="0"/>
-              <a:t>A)</a:t>
+              <a:t>a)</a:t>
             </a:r>
           </a:p>
         </p:txBody>
@@ -4987,7 +5132,7 @@
           <a:p>
             <a:r>
               <a:rPr lang="en-US" b="1" dirty="0"/>
-              <a:t>B)</a:t>
+              <a:t>b)</a:t>
             </a:r>
           </a:p>
         </p:txBody>
@@ -5022,7 +5167,7 @@
           <a:p>
             <a:r>
               <a:rPr lang="en-US" b="1" dirty="0"/>
-              <a:t>C)</a:t>
+              <a:t>c)</a:t>
             </a:r>
           </a:p>
         </p:txBody>
@@ -5294,7 +5439,7 @@
           <a:p>
             <a:r>
               <a:rPr lang="en-US" b="1" dirty="0"/>
-              <a:t>A)</a:t>
+              <a:t>a)</a:t>
             </a:r>
           </a:p>
         </p:txBody>
@@ -5329,7 +5474,7 @@
           <a:p>
             <a:r>
               <a:rPr lang="en-US" b="1" dirty="0"/>
-              <a:t>B)</a:t>
+              <a:t>b)</a:t>
             </a:r>
           </a:p>
         </p:txBody>
@@ -5364,7 +5509,7 @@
           <a:p>
             <a:r>
               <a:rPr lang="en-US" b="1" dirty="0"/>
-              <a:t>C)</a:t>
+              <a:t>c)</a:t>
             </a:r>
           </a:p>
         </p:txBody>
@@ -5489,7 +5634,7 @@
           <a:p>
             <a:r>
               <a:rPr lang="en-US" b="1" dirty="0"/>
-              <a:t>A)</a:t>
+              <a:t>a)</a:t>
             </a:r>
           </a:p>
         </p:txBody>
@@ -5524,7 +5669,7 @@
           <a:p>
             <a:r>
               <a:rPr lang="en-US" b="1" dirty="0"/>
-              <a:t>B)</a:t>
+              <a:t>b)</a:t>
             </a:r>
           </a:p>
         </p:txBody>
@@ -5649,7 +5794,7 @@
           <a:p>
             <a:r>
               <a:rPr lang="en-US" b="1" dirty="0"/>
-              <a:t>A)</a:t>
+              <a:t>a)</a:t>
             </a:r>
           </a:p>
         </p:txBody>
@@ -5684,7 +5829,7 @@
           <a:p>
             <a:r>
               <a:rPr lang="en-US" b="1" dirty="0"/>
-              <a:t>B)</a:t>
+              <a:t>b)</a:t>
             </a:r>
           </a:p>
         </p:txBody>
@@ -5693,6 +5838,1218 @@
     <p:extLst>
       <p:ext uri="{BB962C8B-B14F-4D97-AF65-F5344CB8AC3E}">
         <p14:creationId xmlns:p14="http://schemas.microsoft.com/office/powerpoint/2010/main" val="1440710982"/>
+      </p:ext>
+    </p:extLst>
+  </p:cSld>
+  <p:clrMapOvr>
+    <a:masterClrMapping/>
+  </p:clrMapOvr>
+</p:sld>
+</file>
+
+<file path=ppt/slides/slide7.xml><?xml version="1.0" encoding="utf-8"?>
+<p:sld xmlns:a="http://schemas.openxmlformats.org/drawingml/2006/main" xmlns:r="http://schemas.openxmlformats.org/officeDocument/2006/relationships" xmlns:p="http://schemas.openxmlformats.org/presentationml/2006/main">
+  <p:cSld>
+    <p:bg>
+      <p:bgPr>
+        <a:solidFill>
+          <a:schemeClr val="bg1"/>
+        </a:solidFill>
+        <a:effectLst/>
+      </p:bgPr>
+    </p:bg>
+    <p:spTree>
+      <p:nvGrpSpPr>
+        <p:cNvPr id="1" name=""/>
+        <p:cNvGrpSpPr/>
+        <p:nvPr/>
+      </p:nvGrpSpPr>
+      <p:grpSpPr>
+        <a:xfrm>
+          <a:off x="0" y="0"/>
+          <a:ext cx="0" cy="0"/>
+          <a:chOff x="0" y="0"/>
+          <a:chExt cx="0" cy="0"/>
+        </a:xfrm>
+      </p:grpSpPr>
+      <p:sp useBgFill="1">
+        <p:nvSpPr>
+          <p:cNvPr id="32" name="Rectangle 31">
+            <a:extLst>
+              <a:ext uri="{FF2B5EF4-FFF2-40B4-BE49-F238E27FC236}">
+                <a16:creationId xmlns:a16="http://schemas.microsoft.com/office/drawing/2014/main" id="{B96FC576-AE30-4C09-A12C-0582F2A6A067}"/>
+              </a:ext>
+              <a:ext uri="{C183D7F6-B498-43B3-948B-1728B52AA6E4}">
+                <adec:decorative xmlns:adec="http://schemas.microsoft.com/office/drawing/2017/decorative" val="1"/>
+              </a:ext>
+            </a:extLst>
+          </p:cNvPr>
+          <p:cNvSpPr>
+            <a:spLocks noGrp="1" noRot="1" noChangeAspect="1" noMove="1" noResize="1" noEditPoints="1" noAdjustHandles="1" noChangeArrowheads="1" noChangeShapeType="1" noTextEdit="1"/>
+          </p:cNvSpPr>
+          <p:nvPr>
+            <p:extLst>
+              <p:ext uri="{386F3935-93C4-4BCD-93E2-E3B085C9AB24}">
+                <p16:designElem xmlns:p16="http://schemas.microsoft.com/office/powerpoint/2015/main" val="1"/>
+              </p:ext>
+            </p:extLst>
+          </p:nvPr>
+        </p:nvSpPr>
+        <p:spPr bwMode="white">
+          <a:xfrm>
+            <a:off x="1524" y="0"/>
+            <a:ext cx="12188952" cy="6858000"/>
+          </a:xfrm>
+          <a:prstGeom prst="rect">
+            <a:avLst/>
+          </a:prstGeom>
+          <a:ln>
+            <a:noFill/>
+          </a:ln>
+        </p:spPr>
+        <p:style>
+          <a:lnRef idx="2">
+            <a:schemeClr val="accent1">
+              <a:shade val="50000"/>
+            </a:schemeClr>
+          </a:lnRef>
+          <a:fillRef idx="1">
+            <a:schemeClr val="accent1"/>
+          </a:fillRef>
+          <a:effectRef idx="0">
+            <a:schemeClr val="accent1"/>
+          </a:effectRef>
+          <a:fontRef idx="minor">
+            <a:schemeClr val="lt1"/>
+          </a:fontRef>
+        </p:style>
+        <p:txBody>
+          <a:bodyPr rtlCol="0" anchor="ctr"/>
+          <a:lstStyle>
+            <a:defPPr>
+              <a:defRPr lang="en-US"/>
+            </a:defPPr>
+            <a:lvl1pPr marL="0" algn="l" defTabSz="914400" rtl="0" eaLnBrk="1" latinLnBrk="0" hangingPunct="1">
+              <a:defRPr sz="1800" kern="1200">
+                <a:solidFill>
+                  <a:schemeClr val="lt1"/>
+                </a:solidFill>
+                <a:latin typeface="+mn-lt"/>
+                <a:ea typeface="+mn-ea"/>
+                <a:cs typeface="+mn-cs"/>
+              </a:defRPr>
+            </a:lvl1pPr>
+            <a:lvl2pPr marL="457200" algn="l" defTabSz="914400" rtl="0" eaLnBrk="1" latinLnBrk="0" hangingPunct="1">
+              <a:defRPr sz="1800" kern="1200">
+                <a:solidFill>
+                  <a:schemeClr val="lt1"/>
+                </a:solidFill>
+                <a:latin typeface="+mn-lt"/>
+                <a:ea typeface="+mn-ea"/>
+                <a:cs typeface="+mn-cs"/>
+              </a:defRPr>
+            </a:lvl2pPr>
+            <a:lvl3pPr marL="914400" algn="l" defTabSz="914400" rtl="0" eaLnBrk="1" latinLnBrk="0" hangingPunct="1">
+              <a:defRPr sz="1800" kern="1200">
+                <a:solidFill>
+                  <a:schemeClr val="lt1"/>
+                </a:solidFill>
+                <a:latin typeface="+mn-lt"/>
+                <a:ea typeface="+mn-ea"/>
+                <a:cs typeface="+mn-cs"/>
+              </a:defRPr>
+            </a:lvl3pPr>
+            <a:lvl4pPr marL="1371600" algn="l" defTabSz="914400" rtl="0" eaLnBrk="1" latinLnBrk="0" hangingPunct="1">
+              <a:defRPr sz="1800" kern="1200">
+                <a:solidFill>
+                  <a:schemeClr val="lt1"/>
+                </a:solidFill>
+                <a:latin typeface="+mn-lt"/>
+                <a:ea typeface="+mn-ea"/>
+                <a:cs typeface="+mn-cs"/>
+              </a:defRPr>
+            </a:lvl4pPr>
+            <a:lvl5pPr marL="1828800" algn="l" defTabSz="914400" rtl="0" eaLnBrk="1" latinLnBrk="0" hangingPunct="1">
+              <a:defRPr sz="1800" kern="1200">
+                <a:solidFill>
+                  <a:schemeClr val="lt1"/>
+                </a:solidFill>
+                <a:latin typeface="+mn-lt"/>
+                <a:ea typeface="+mn-ea"/>
+                <a:cs typeface="+mn-cs"/>
+              </a:defRPr>
+            </a:lvl5pPr>
+            <a:lvl6pPr marL="2286000" algn="l" defTabSz="914400" rtl="0" eaLnBrk="1" latinLnBrk="0" hangingPunct="1">
+              <a:defRPr sz="1800" kern="1200">
+                <a:solidFill>
+                  <a:schemeClr val="lt1"/>
+                </a:solidFill>
+                <a:latin typeface="+mn-lt"/>
+                <a:ea typeface="+mn-ea"/>
+                <a:cs typeface="+mn-cs"/>
+              </a:defRPr>
+            </a:lvl6pPr>
+            <a:lvl7pPr marL="2743200" algn="l" defTabSz="914400" rtl="0" eaLnBrk="1" latinLnBrk="0" hangingPunct="1">
+              <a:defRPr sz="1800" kern="1200">
+                <a:solidFill>
+                  <a:schemeClr val="lt1"/>
+                </a:solidFill>
+                <a:latin typeface="+mn-lt"/>
+                <a:ea typeface="+mn-ea"/>
+                <a:cs typeface="+mn-cs"/>
+              </a:defRPr>
+            </a:lvl7pPr>
+            <a:lvl8pPr marL="3200400" algn="l" defTabSz="914400" rtl="0" eaLnBrk="1" latinLnBrk="0" hangingPunct="1">
+              <a:defRPr sz="1800" kern="1200">
+                <a:solidFill>
+                  <a:schemeClr val="lt1"/>
+                </a:solidFill>
+                <a:latin typeface="+mn-lt"/>
+                <a:ea typeface="+mn-ea"/>
+                <a:cs typeface="+mn-cs"/>
+              </a:defRPr>
+            </a:lvl8pPr>
+            <a:lvl9pPr marL="3657600" algn="l" defTabSz="914400" rtl="0" eaLnBrk="1" latinLnBrk="0" hangingPunct="1">
+              <a:defRPr sz="1800" kern="1200">
+                <a:solidFill>
+                  <a:schemeClr val="lt1"/>
+                </a:solidFill>
+                <a:latin typeface="+mn-lt"/>
+                <a:ea typeface="+mn-ea"/>
+                <a:cs typeface="+mn-cs"/>
+              </a:defRPr>
+            </a:lvl9pPr>
+          </a:lstStyle>
+          <a:p>
+            <a:pPr algn="ctr"/>
+            <a:endParaRPr lang="en-US"/>
+          </a:p>
+        </p:txBody>
+      </p:sp>
+      <p:pic>
+        <p:nvPicPr>
+          <p:cNvPr id="21" name="Picture 20" descr="A graph of a patient's recovery&#10;&#10;Description automatically generated">
+            <a:extLst>
+              <a:ext uri="{FF2B5EF4-FFF2-40B4-BE49-F238E27FC236}">
+                <a16:creationId xmlns:a16="http://schemas.microsoft.com/office/drawing/2014/main" id="{CA1B21DF-FA8D-6516-3D48-D1DED840D985}"/>
+              </a:ext>
+            </a:extLst>
+          </p:cNvPr>
+          <p:cNvPicPr>
+            <a:picLocks noChangeAspect="1"/>
+          </p:cNvPicPr>
+          <p:nvPr/>
+        </p:nvPicPr>
+        <p:blipFill rotWithShape="1">
+          <a:blip r:embed="rId3"/>
+          <a:srcRect r="2" b="15775"/>
+          <a:stretch/>
+        </p:blipFill>
+        <p:spPr>
+          <a:xfrm>
+            <a:off x="5909200" y="0"/>
+            <a:ext cx="5992064" cy="3368842"/>
+          </a:xfrm>
+          <a:prstGeom prst="rect">
+            <a:avLst/>
+          </a:prstGeom>
+        </p:spPr>
+      </p:pic>
+      <p:pic>
+        <p:nvPicPr>
+          <p:cNvPr id="27" name="Picture 26" descr="A graph of a patient's survival&#10;&#10;Description automatically generated">
+            <a:extLst>
+              <a:ext uri="{FF2B5EF4-FFF2-40B4-BE49-F238E27FC236}">
+                <a16:creationId xmlns:a16="http://schemas.microsoft.com/office/drawing/2014/main" id="{5467B5CD-5EEB-DB5F-A72A-2387A39C9A7C}"/>
+              </a:ext>
+            </a:extLst>
+          </p:cNvPr>
+          <p:cNvPicPr>
+            <a:picLocks noChangeAspect="1"/>
+          </p:cNvPicPr>
+          <p:nvPr/>
+        </p:nvPicPr>
+        <p:blipFill rotWithShape="1">
+          <a:blip r:embed="rId4"/>
+          <a:srcRect r="2" b="15775"/>
+          <a:stretch/>
+        </p:blipFill>
+        <p:spPr>
+          <a:xfrm>
+            <a:off x="56538" y="45513"/>
+            <a:ext cx="6039462" cy="3395489"/>
+          </a:xfrm>
+          <a:prstGeom prst="rect">
+            <a:avLst/>
+          </a:prstGeom>
+        </p:spPr>
+      </p:pic>
+      <p:pic>
+        <p:nvPicPr>
+          <p:cNvPr id="23" name="Picture 22" descr="A graph of a patient's survival&#10;&#10;Description automatically generated">
+            <a:extLst>
+              <a:ext uri="{FF2B5EF4-FFF2-40B4-BE49-F238E27FC236}">
+                <a16:creationId xmlns:a16="http://schemas.microsoft.com/office/drawing/2014/main" id="{6559310A-1B85-4B11-0377-0F65C228C7AF}"/>
+              </a:ext>
+            </a:extLst>
+          </p:cNvPr>
+          <p:cNvPicPr>
+            <a:picLocks noChangeAspect="1"/>
+          </p:cNvPicPr>
+          <p:nvPr/>
+        </p:nvPicPr>
+        <p:blipFill rotWithShape="1">
+          <a:blip r:embed="rId5"/>
+          <a:srcRect r="2" b="15775"/>
+          <a:stretch/>
+        </p:blipFill>
+        <p:spPr>
+          <a:xfrm>
+            <a:off x="6035079" y="3368842"/>
+            <a:ext cx="6044145" cy="3398132"/>
+          </a:xfrm>
+          <a:prstGeom prst="rect">
+            <a:avLst/>
+          </a:prstGeom>
+        </p:spPr>
+      </p:pic>
+      <p:pic>
+        <p:nvPicPr>
+          <p:cNvPr id="25" name="Picture 24" descr="A graph of a patient's survival&#10;&#10;Description automatically generated">
+            <a:extLst>
+              <a:ext uri="{FF2B5EF4-FFF2-40B4-BE49-F238E27FC236}">
+                <a16:creationId xmlns:a16="http://schemas.microsoft.com/office/drawing/2014/main" id="{155562BB-EB56-6232-F6AC-2F6369D7E540}"/>
+              </a:ext>
+            </a:extLst>
+          </p:cNvPr>
+          <p:cNvPicPr>
+            <a:picLocks noChangeAspect="1"/>
+          </p:cNvPicPr>
+          <p:nvPr/>
+        </p:nvPicPr>
+        <p:blipFill rotWithShape="1">
+          <a:blip r:embed="rId6"/>
+          <a:srcRect r="2" b="15775"/>
+          <a:stretch/>
+        </p:blipFill>
+        <p:spPr>
+          <a:xfrm>
+            <a:off x="71571" y="3423788"/>
+            <a:ext cx="6044145" cy="3398132"/>
+          </a:xfrm>
+          <a:prstGeom prst="rect">
+            <a:avLst/>
+          </a:prstGeom>
+        </p:spPr>
+      </p:pic>
+      <p:sp>
+        <p:nvSpPr>
+          <p:cNvPr id="30" name="TextBox 29">
+            <a:extLst>
+              <a:ext uri="{FF2B5EF4-FFF2-40B4-BE49-F238E27FC236}">
+                <a16:creationId xmlns:a16="http://schemas.microsoft.com/office/drawing/2014/main" id="{C1996A3B-E381-F22C-063F-1082B672E7C4}"/>
+              </a:ext>
+            </a:extLst>
+          </p:cNvPr>
+          <p:cNvSpPr txBox="1"/>
+          <p:nvPr/>
+        </p:nvSpPr>
+        <p:spPr>
+          <a:xfrm>
+            <a:off x="7390023" y="2838908"/>
+            <a:ext cx="3030415" cy="369332"/>
+          </a:xfrm>
+          <a:prstGeom prst="rect">
+            <a:avLst/>
+          </a:prstGeom>
+          <a:noFill/>
+        </p:spPr>
+        <p:txBody>
+          <a:bodyPr wrap="square" rtlCol="0">
+            <a:spAutoFit/>
+          </a:bodyPr>
+          <a:lstStyle/>
+          <a:p>
+            <a:r>
+              <a:rPr lang="en-US" dirty="0">
+                <a:solidFill>
+                  <a:srgbClr val="FF0000"/>
+                </a:solidFill>
+              </a:rPr>
+              <a:t>Log-rank p-value &lt; 0.001**</a:t>
+            </a:r>
+          </a:p>
+        </p:txBody>
+      </p:sp>
+      <p:sp>
+        <p:nvSpPr>
+          <p:cNvPr id="31" name="TextBox 30">
+            <a:extLst>
+              <a:ext uri="{FF2B5EF4-FFF2-40B4-BE49-F238E27FC236}">
+                <a16:creationId xmlns:a16="http://schemas.microsoft.com/office/drawing/2014/main" id="{2C4E47C4-D97B-D430-6F0C-0D23428E0639}"/>
+              </a:ext>
+            </a:extLst>
+          </p:cNvPr>
+          <p:cNvSpPr txBox="1"/>
+          <p:nvPr/>
+        </p:nvSpPr>
+        <p:spPr>
+          <a:xfrm>
+            <a:off x="7390024" y="6349515"/>
+            <a:ext cx="3030415" cy="369332"/>
+          </a:xfrm>
+          <a:prstGeom prst="rect">
+            <a:avLst/>
+          </a:prstGeom>
+          <a:noFill/>
+        </p:spPr>
+        <p:txBody>
+          <a:bodyPr wrap="square" rtlCol="0">
+            <a:spAutoFit/>
+          </a:bodyPr>
+          <a:lstStyle/>
+          <a:p>
+            <a:r>
+              <a:rPr lang="en-US" dirty="0">
+                <a:solidFill>
+                  <a:srgbClr val="FF0000"/>
+                </a:solidFill>
+              </a:rPr>
+              <a:t>Log-rank p-value &lt; 0.001**</a:t>
+            </a:r>
+          </a:p>
+        </p:txBody>
+      </p:sp>
+      <p:sp>
+        <p:nvSpPr>
+          <p:cNvPr id="33" name="TextBox 32">
+            <a:extLst>
+              <a:ext uri="{FF2B5EF4-FFF2-40B4-BE49-F238E27FC236}">
+                <a16:creationId xmlns:a16="http://schemas.microsoft.com/office/drawing/2014/main" id="{7798E397-8449-BB6D-6D59-4E08A2337BC1}"/>
+              </a:ext>
+            </a:extLst>
+          </p:cNvPr>
+          <p:cNvSpPr txBox="1"/>
+          <p:nvPr/>
+        </p:nvSpPr>
+        <p:spPr>
+          <a:xfrm>
+            <a:off x="1578437" y="2842317"/>
+            <a:ext cx="3030415" cy="369332"/>
+          </a:xfrm>
+          <a:prstGeom prst="rect">
+            <a:avLst/>
+          </a:prstGeom>
+          <a:noFill/>
+        </p:spPr>
+        <p:txBody>
+          <a:bodyPr wrap="square" rtlCol="0">
+            <a:spAutoFit/>
+          </a:bodyPr>
+          <a:lstStyle/>
+          <a:p>
+            <a:r>
+              <a:rPr lang="en-US" dirty="0">
+                <a:solidFill>
+                  <a:srgbClr val="FF0000"/>
+                </a:solidFill>
+              </a:rPr>
+              <a:t>Log-rank p-value &lt; 0.001**</a:t>
+            </a:r>
+          </a:p>
+        </p:txBody>
+      </p:sp>
+      <p:sp>
+        <p:nvSpPr>
+          <p:cNvPr id="34" name="TextBox 33">
+            <a:extLst>
+              <a:ext uri="{FF2B5EF4-FFF2-40B4-BE49-F238E27FC236}">
+                <a16:creationId xmlns:a16="http://schemas.microsoft.com/office/drawing/2014/main" id="{E174F3B8-82B5-9070-4AB0-5E2A39D31B6C}"/>
+              </a:ext>
+            </a:extLst>
+          </p:cNvPr>
+          <p:cNvSpPr txBox="1"/>
+          <p:nvPr/>
+        </p:nvSpPr>
+        <p:spPr>
+          <a:xfrm>
+            <a:off x="1578437" y="6348027"/>
+            <a:ext cx="3030415" cy="369332"/>
+          </a:xfrm>
+          <a:prstGeom prst="rect">
+            <a:avLst/>
+          </a:prstGeom>
+          <a:noFill/>
+        </p:spPr>
+        <p:txBody>
+          <a:bodyPr wrap="square" rtlCol="0">
+            <a:spAutoFit/>
+          </a:bodyPr>
+          <a:lstStyle/>
+          <a:p>
+            <a:r>
+              <a:rPr lang="en-US" dirty="0">
+                <a:solidFill>
+                  <a:srgbClr val="FF0000"/>
+                </a:solidFill>
+              </a:rPr>
+              <a:t>Log-rank p-value &lt; 0.001**</a:t>
+            </a:r>
+          </a:p>
+        </p:txBody>
+      </p:sp>
+      <p:sp>
+        <p:nvSpPr>
+          <p:cNvPr id="35" name="TextBox 34">
+            <a:extLst>
+              <a:ext uri="{FF2B5EF4-FFF2-40B4-BE49-F238E27FC236}">
+                <a16:creationId xmlns:a16="http://schemas.microsoft.com/office/drawing/2014/main" id="{EE25C886-3721-B59E-659D-A51AD9D75B4D}"/>
+              </a:ext>
+            </a:extLst>
+          </p:cNvPr>
+          <p:cNvSpPr txBox="1"/>
+          <p:nvPr/>
+        </p:nvSpPr>
+        <p:spPr>
+          <a:xfrm>
+            <a:off x="0" y="3244334"/>
+            <a:ext cx="450575" cy="369332"/>
+          </a:xfrm>
+          <a:prstGeom prst="rect">
+            <a:avLst/>
+          </a:prstGeom>
+          <a:noFill/>
+        </p:spPr>
+        <p:txBody>
+          <a:bodyPr wrap="square" rtlCol="0">
+            <a:spAutoFit/>
+          </a:bodyPr>
+          <a:lstStyle/>
+          <a:p>
+            <a:r>
+              <a:rPr lang="en-US" b="1" dirty="0"/>
+              <a:t>a)</a:t>
+            </a:r>
+          </a:p>
+        </p:txBody>
+      </p:sp>
+      <p:sp>
+        <p:nvSpPr>
+          <p:cNvPr id="36" name="TextBox 35">
+            <a:extLst>
+              <a:ext uri="{FF2B5EF4-FFF2-40B4-BE49-F238E27FC236}">
+                <a16:creationId xmlns:a16="http://schemas.microsoft.com/office/drawing/2014/main" id="{ACB8E47F-D875-B75E-3296-B04785967742}"/>
+              </a:ext>
+            </a:extLst>
+          </p:cNvPr>
+          <p:cNvSpPr txBox="1"/>
+          <p:nvPr/>
+        </p:nvSpPr>
+        <p:spPr>
+          <a:xfrm>
+            <a:off x="5878654" y="3244334"/>
+            <a:ext cx="450575" cy="369332"/>
+          </a:xfrm>
+          <a:prstGeom prst="rect">
+            <a:avLst/>
+          </a:prstGeom>
+          <a:noFill/>
+        </p:spPr>
+        <p:txBody>
+          <a:bodyPr wrap="square" rtlCol="0">
+            <a:spAutoFit/>
+          </a:bodyPr>
+          <a:lstStyle/>
+          <a:p>
+            <a:r>
+              <a:rPr lang="en-US" b="1" dirty="0"/>
+              <a:t>b)</a:t>
+            </a:r>
+          </a:p>
+        </p:txBody>
+      </p:sp>
+      <p:sp>
+        <p:nvSpPr>
+          <p:cNvPr id="37" name="TextBox 36">
+            <a:extLst>
+              <a:ext uri="{FF2B5EF4-FFF2-40B4-BE49-F238E27FC236}">
+                <a16:creationId xmlns:a16="http://schemas.microsoft.com/office/drawing/2014/main" id="{2E2E1B82-F826-FEF9-FE3A-19B1278487D1}"/>
+              </a:ext>
+            </a:extLst>
+          </p:cNvPr>
+          <p:cNvSpPr txBox="1"/>
+          <p:nvPr/>
+        </p:nvSpPr>
+        <p:spPr>
+          <a:xfrm>
+            <a:off x="5905461" y="6488668"/>
+            <a:ext cx="450575" cy="369332"/>
+          </a:xfrm>
+          <a:prstGeom prst="rect">
+            <a:avLst/>
+          </a:prstGeom>
+          <a:noFill/>
+        </p:spPr>
+        <p:txBody>
+          <a:bodyPr wrap="square" rtlCol="0">
+            <a:spAutoFit/>
+          </a:bodyPr>
+          <a:lstStyle/>
+          <a:p>
+            <a:r>
+              <a:rPr lang="en-US" b="1" dirty="0"/>
+              <a:t>d)</a:t>
+            </a:r>
+          </a:p>
+        </p:txBody>
+      </p:sp>
+      <p:sp>
+        <p:nvSpPr>
+          <p:cNvPr id="38" name="TextBox 37">
+            <a:extLst>
+              <a:ext uri="{FF2B5EF4-FFF2-40B4-BE49-F238E27FC236}">
+                <a16:creationId xmlns:a16="http://schemas.microsoft.com/office/drawing/2014/main" id="{5B75E994-1460-5EA6-0E6C-F8DB2624C24D}"/>
+              </a:ext>
+            </a:extLst>
+          </p:cNvPr>
+          <p:cNvSpPr txBox="1"/>
+          <p:nvPr/>
+        </p:nvSpPr>
+        <p:spPr>
+          <a:xfrm>
+            <a:off x="23317" y="6488668"/>
+            <a:ext cx="450575" cy="369332"/>
+          </a:xfrm>
+          <a:prstGeom prst="rect">
+            <a:avLst/>
+          </a:prstGeom>
+          <a:noFill/>
+        </p:spPr>
+        <p:txBody>
+          <a:bodyPr wrap="square" rtlCol="0">
+            <a:spAutoFit/>
+          </a:bodyPr>
+          <a:lstStyle/>
+          <a:p>
+            <a:r>
+              <a:rPr lang="en-US" b="1" dirty="0"/>
+              <a:t>c)</a:t>
+            </a:r>
+          </a:p>
+        </p:txBody>
+      </p:sp>
+    </p:spTree>
+    <p:extLst>
+      <p:ext uri="{BB962C8B-B14F-4D97-AF65-F5344CB8AC3E}">
+        <p14:creationId xmlns:p14="http://schemas.microsoft.com/office/powerpoint/2010/main" val="1181775855"/>
+      </p:ext>
+    </p:extLst>
+  </p:cSld>
+  <p:clrMapOvr>
+    <a:masterClrMapping/>
+  </p:clrMapOvr>
+</p:sld>
+</file>
+
+<file path=ppt/slides/slide8.xml><?xml version="1.0" encoding="utf-8"?>
+<p:sld xmlns:a="http://schemas.openxmlformats.org/drawingml/2006/main" xmlns:r="http://schemas.openxmlformats.org/officeDocument/2006/relationships" xmlns:p="http://schemas.openxmlformats.org/presentationml/2006/main">
+  <p:cSld>
+    <p:bg>
+      <p:bgPr>
+        <a:solidFill>
+          <a:schemeClr val="bg1"/>
+        </a:solidFill>
+        <a:effectLst/>
+      </p:bgPr>
+    </p:bg>
+    <p:spTree>
+      <p:nvGrpSpPr>
+        <p:cNvPr id="1" name=""/>
+        <p:cNvGrpSpPr/>
+        <p:nvPr/>
+      </p:nvGrpSpPr>
+      <p:grpSpPr>
+        <a:xfrm>
+          <a:off x="0" y="0"/>
+          <a:ext cx="0" cy="0"/>
+          <a:chOff x="0" y="0"/>
+          <a:chExt cx="0" cy="0"/>
+        </a:xfrm>
+      </p:grpSpPr>
+      <p:sp useBgFill="1">
+        <p:nvSpPr>
+          <p:cNvPr id="32" name="Rectangle 31">
+            <a:extLst>
+              <a:ext uri="{FF2B5EF4-FFF2-40B4-BE49-F238E27FC236}">
+                <a16:creationId xmlns:a16="http://schemas.microsoft.com/office/drawing/2014/main" id="{B96FC576-AE30-4C09-A12C-0582F2A6A067}"/>
+              </a:ext>
+              <a:ext uri="{C183D7F6-B498-43B3-948B-1728B52AA6E4}">
+                <adec:decorative xmlns:adec="http://schemas.microsoft.com/office/drawing/2017/decorative" val="1"/>
+              </a:ext>
+            </a:extLst>
+          </p:cNvPr>
+          <p:cNvSpPr>
+            <a:spLocks noGrp="1" noRot="1" noChangeAspect="1" noMove="1" noResize="1" noEditPoints="1" noAdjustHandles="1" noChangeArrowheads="1" noChangeShapeType="1" noTextEdit="1"/>
+          </p:cNvSpPr>
+          <p:nvPr>
+            <p:extLst>
+              <p:ext uri="{386F3935-93C4-4BCD-93E2-E3B085C9AB24}">
+                <p16:designElem xmlns:p16="http://schemas.microsoft.com/office/powerpoint/2015/main" val="1"/>
+              </p:ext>
+            </p:extLst>
+          </p:nvPr>
+        </p:nvSpPr>
+        <p:spPr bwMode="white">
+          <a:xfrm>
+            <a:off x="1524" y="0"/>
+            <a:ext cx="12188952" cy="6858000"/>
+          </a:xfrm>
+          <a:prstGeom prst="rect">
+            <a:avLst/>
+          </a:prstGeom>
+          <a:ln>
+            <a:noFill/>
+          </a:ln>
+        </p:spPr>
+        <p:style>
+          <a:lnRef idx="2">
+            <a:schemeClr val="accent1">
+              <a:shade val="50000"/>
+            </a:schemeClr>
+          </a:lnRef>
+          <a:fillRef idx="1">
+            <a:schemeClr val="accent1"/>
+          </a:fillRef>
+          <a:effectRef idx="0">
+            <a:schemeClr val="accent1"/>
+          </a:effectRef>
+          <a:fontRef idx="minor">
+            <a:schemeClr val="lt1"/>
+          </a:fontRef>
+        </p:style>
+        <p:txBody>
+          <a:bodyPr rtlCol="0" anchor="ctr"/>
+          <a:lstStyle>
+            <a:defPPr>
+              <a:defRPr lang="en-US"/>
+            </a:defPPr>
+            <a:lvl1pPr marL="0" algn="l" defTabSz="914400" rtl="0" eaLnBrk="1" latinLnBrk="0" hangingPunct="1">
+              <a:defRPr sz="1800" kern="1200">
+                <a:solidFill>
+                  <a:schemeClr val="lt1"/>
+                </a:solidFill>
+                <a:latin typeface="+mn-lt"/>
+                <a:ea typeface="+mn-ea"/>
+                <a:cs typeface="+mn-cs"/>
+              </a:defRPr>
+            </a:lvl1pPr>
+            <a:lvl2pPr marL="457200" algn="l" defTabSz="914400" rtl="0" eaLnBrk="1" latinLnBrk="0" hangingPunct="1">
+              <a:defRPr sz="1800" kern="1200">
+                <a:solidFill>
+                  <a:schemeClr val="lt1"/>
+                </a:solidFill>
+                <a:latin typeface="+mn-lt"/>
+                <a:ea typeface="+mn-ea"/>
+                <a:cs typeface="+mn-cs"/>
+              </a:defRPr>
+            </a:lvl2pPr>
+            <a:lvl3pPr marL="914400" algn="l" defTabSz="914400" rtl="0" eaLnBrk="1" latinLnBrk="0" hangingPunct="1">
+              <a:defRPr sz="1800" kern="1200">
+                <a:solidFill>
+                  <a:schemeClr val="lt1"/>
+                </a:solidFill>
+                <a:latin typeface="+mn-lt"/>
+                <a:ea typeface="+mn-ea"/>
+                <a:cs typeface="+mn-cs"/>
+              </a:defRPr>
+            </a:lvl3pPr>
+            <a:lvl4pPr marL="1371600" algn="l" defTabSz="914400" rtl="0" eaLnBrk="1" latinLnBrk="0" hangingPunct="1">
+              <a:defRPr sz="1800" kern="1200">
+                <a:solidFill>
+                  <a:schemeClr val="lt1"/>
+                </a:solidFill>
+                <a:latin typeface="+mn-lt"/>
+                <a:ea typeface="+mn-ea"/>
+                <a:cs typeface="+mn-cs"/>
+              </a:defRPr>
+            </a:lvl4pPr>
+            <a:lvl5pPr marL="1828800" algn="l" defTabSz="914400" rtl="0" eaLnBrk="1" latinLnBrk="0" hangingPunct="1">
+              <a:defRPr sz="1800" kern="1200">
+                <a:solidFill>
+                  <a:schemeClr val="lt1"/>
+                </a:solidFill>
+                <a:latin typeface="+mn-lt"/>
+                <a:ea typeface="+mn-ea"/>
+                <a:cs typeface="+mn-cs"/>
+              </a:defRPr>
+            </a:lvl5pPr>
+            <a:lvl6pPr marL="2286000" algn="l" defTabSz="914400" rtl="0" eaLnBrk="1" latinLnBrk="0" hangingPunct="1">
+              <a:defRPr sz="1800" kern="1200">
+                <a:solidFill>
+                  <a:schemeClr val="lt1"/>
+                </a:solidFill>
+                <a:latin typeface="+mn-lt"/>
+                <a:ea typeface="+mn-ea"/>
+                <a:cs typeface="+mn-cs"/>
+              </a:defRPr>
+            </a:lvl6pPr>
+            <a:lvl7pPr marL="2743200" algn="l" defTabSz="914400" rtl="0" eaLnBrk="1" latinLnBrk="0" hangingPunct="1">
+              <a:defRPr sz="1800" kern="1200">
+                <a:solidFill>
+                  <a:schemeClr val="lt1"/>
+                </a:solidFill>
+                <a:latin typeface="+mn-lt"/>
+                <a:ea typeface="+mn-ea"/>
+                <a:cs typeface="+mn-cs"/>
+              </a:defRPr>
+            </a:lvl7pPr>
+            <a:lvl8pPr marL="3200400" algn="l" defTabSz="914400" rtl="0" eaLnBrk="1" latinLnBrk="0" hangingPunct="1">
+              <a:defRPr sz="1800" kern="1200">
+                <a:solidFill>
+                  <a:schemeClr val="lt1"/>
+                </a:solidFill>
+                <a:latin typeface="+mn-lt"/>
+                <a:ea typeface="+mn-ea"/>
+                <a:cs typeface="+mn-cs"/>
+              </a:defRPr>
+            </a:lvl8pPr>
+            <a:lvl9pPr marL="3657600" algn="l" defTabSz="914400" rtl="0" eaLnBrk="1" latinLnBrk="0" hangingPunct="1">
+              <a:defRPr sz="1800" kern="1200">
+                <a:solidFill>
+                  <a:schemeClr val="lt1"/>
+                </a:solidFill>
+                <a:latin typeface="+mn-lt"/>
+                <a:ea typeface="+mn-ea"/>
+                <a:cs typeface="+mn-cs"/>
+              </a:defRPr>
+            </a:lvl9pPr>
+          </a:lstStyle>
+          <a:p>
+            <a:pPr algn="ctr"/>
+            <a:endParaRPr lang="en-US"/>
+          </a:p>
+        </p:txBody>
+      </p:sp>
+      <p:pic>
+        <p:nvPicPr>
+          <p:cNvPr id="3" name="Picture 2" descr="A graph of a patient's survival&#10;&#10;Description automatically generated">
+            <a:extLst>
+              <a:ext uri="{FF2B5EF4-FFF2-40B4-BE49-F238E27FC236}">
+                <a16:creationId xmlns:a16="http://schemas.microsoft.com/office/drawing/2014/main" id="{10D0ADA8-A966-D4CE-29C3-F0CAB8C5126B}"/>
+              </a:ext>
+            </a:extLst>
+          </p:cNvPr>
+          <p:cNvPicPr>
+            <a:picLocks noChangeAspect="1"/>
+          </p:cNvPicPr>
+          <p:nvPr/>
+        </p:nvPicPr>
+        <p:blipFill>
+          <a:blip r:embed="rId3"/>
+          <a:stretch>
+            <a:fillRect/>
+          </a:stretch>
+        </p:blipFill>
+        <p:spPr>
+          <a:xfrm>
+            <a:off x="1296211" y="3510242"/>
+            <a:ext cx="5010585" cy="3340390"/>
+          </a:xfrm>
+          <a:prstGeom prst="rect">
+            <a:avLst/>
+          </a:prstGeom>
+        </p:spPr>
+      </p:pic>
+      <p:pic>
+        <p:nvPicPr>
+          <p:cNvPr id="7" name="Picture 6" descr="A graph of a patient's survival&#10;&#10;Description automatically generated">
+            <a:extLst>
+              <a:ext uri="{FF2B5EF4-FFF2-40B4-BE49-F238E27FC236}">
+                <a16:creationId xmlns:a16="http://schemas.microsoft.com/office/drawing/2014/main" id="{8FFB44C1-3CFE-5F99-4706-C61ECD602EA0}"/>
+              </a:ext>
+            </a:extLst>
+          </p:cNvPr>
+          <p:cNvPicPr>
+            <a:picLocks noChangeAspect="1"/>
+          </p:cNvPicPr>
+          <p:nvPr/>
+        </p:nvPicPr>
+        <p:blipFill>
+          <a:blip r:embed="rId4"/>
+          <a:stretch>
+            <a:fillRect/>
+          </a:stretch>
+        </p:blipFill>
+        <p:spPr>
+          <a:xfrm>
+            <a:off x="6267622" y="7172"/>
+            <a:ext cx="5177592" cy="3451728"/>
+          </a:xfrm>
+          <a:prstGeom prst="rect">
+            <a:avLst/>
+          </a:prstGeom>
+        </p:spPr>
+      </p:pic>
+      <p:pic>
+        <p:nvPicPr>
+          <p:cNvPr id="9" name="Picture 8" descr="A graph of a patient's survival&#10;&#10;Description automatically generated">
+            <a:extLst>
+              <a:ext uri="{FF2B5EF4-FFF2-40B4-BE49-F238E27FC236}">
+                <a16:creationId xmlns:a16="http://schemas.microsoft.com/office/drawing/2014/main" id="{DB7D4B7A-8426-B785-B4BB-C0763A291159}"/>
+              </a:ext>
+            </a:extLst>
+          </p:cNvPr>
+          <p:cNvPicPr>
+            <a:picLocks noChangeAspect="1"/>
+          </p:cNvPicPr>
+          <p:nvPr/>
+        </p:nvPicPr>
+        <p:blipFill>
+          <a:blip r:embed="rId5"/>
+          <a:stretch>
+            <a:fillRect/>
+          </a:stretch>
+        </p:blipFill>
+        <p:spPr>
+          <a:xfrm>
+            <a:off x="1212708" y="32843"/>
+            <a:ext cx="5177593" cy="3451728"/>
+          </a:xfrm>
+          <a:prstGeom prst="rect">
+            <a:avLst/>
+          </a:prstGeom>
+        </p:spPr>
+      </p:pic>
+      <p:sp>
+        <p:nvSpPr>
+          <p:cNvPr id="33" name="TextBox 32">
+            <a:extLst>
+              <a:ext uri="{FF2B5EF4-FFF2-40B4-BE49-F238E27FC236}">
+                <a16:creationId xmlns:a16="http://schemas.microsoft.com/office/drawing/2014/main" id="{7798E397-8449-BB6D-6D59-4E08A2337BC1}"/>
+              </a:ext>
+            </a:extLst>
+          </p:cNvPr>
+          <p:cNvSpPr txBox="1"/>
+          <p:nvPr/>
+        </p:nvSpPr>
+        <p:spPr>
+          <a:xfrm>
+            <a:off x="2410206" y="2317539"/>
+            <a:ext cx="3030415" cy="369332"/>
+          </a:xfrm>
+          <a:prstGeom prst="rect">
+            <a:avLst/>
+          </a:prstGeom>
+          <a:noFill/>
+        </p:spPr>
+        <p:txBody>
+          <a:bodyPr wrap="square" rtlCol="0">
+            <a:spAutoFit/>
+          </a:bodyPr>
+          <a:lstStyle/>
+          <a:p>
+            <a:r>
+              <a:rPr lang="en-US" dirty="0">
+                <a:solidFill>
+                  <a:srgbClr val="FF0000"/>
+                </a:solidFill>
+              </a:rPr>
+              <a:t>Log-rank p-value &lt; 0.001**</a:t>
+            </a:r>
+          </a:p>
+        </p:txBody>
+      </p:sp>
+      <p:sp>
+        <p:nvSpPr>
+          <p:cNvPr id="34" name="TextBox 33">
+            <a:extLst>
+              <a:ext uri="{FF2B5EF4-FFF2-40B4-BE49-F238E27FC236}">
+                <a16:creationId xmlns:a16="http://schemas.microsoft.com/office/drawing/2014/main" id="{E174F3B8-82B5-9070-4AB0-5E2A39D31B6C}"/>
+              </a:ext>
+            </a:extLst>
+          </p:cNvPr>
+          <p:cNvSpPr txBox="1"/>
+          <p:nvPr/>
+        </p:nvSpPr>
+        <p:spPr>
+          <a:xfrm>
+            <a:off x="2410205" y="5769038"/>
+            <a:ext cx="3030415" cy="369332"/>
+          </a:xfrm>
+          <a:prstGeom prst="rect">
+            <a:avLst/>
+          </a:prstGeom>
+          <a:noFill/>
+        </p:spPr>
+        <p:txBody>
+          <a:bodyPr wrap="square" rtlCol="0">
+            <a:spAutoFit/>
+          </a:bodyPr>
+          <a:lstStyle/>
+          <a:p>
+            <a:r>
+              <a:rPr lang="en-US" dirty="0">
+                <a:solidFill>
+                  <a:srgbClr val="FF0000"/>
+                </a:solidFill>
+              </a:rPr>
+              <a:t>Log-rank p-value &lt; 0.001**</a:t>
+            </a:r>
+          </a:p>
+        </p:txBody>
+      </p:sp>
+      <p:pic>
+        <p:nvPicPr>
+          <p:cNvPr id="5" name="Picture 4" descr="A graph of a patient's survival&#10;&#10;Description automatically generated">
+            <a:extLst>
+              <a:ext uri="{FF2B5EF4-FFF2-40B4-BE49-F238E27FC236}">
+                <a16:creationId xmlns:a16="http://schemas.microsoft.com/office/drawing/2014/main" id="{00E754AD-26D9-ED8D-1450-2C65E6386A1C}"/>
+              </a:ext>
+            </a:extLst>
+          </p:cNvPr>
+          <p:cNvPicPr>
+            <a:picLocks noChangeAspect="1"/>
+          </p:cNvPicPr>
+          <p:nvPr/>
+        </p:nvPicPr>
+        <p:blipFill>
+          <a:blip r:embed="rId6"/>
+          <a:stretch>
+            <a:fillRect/>
+          </a:stretch>
+        </p:blipFill>
+        <p:spPr>
+          <a:xfrm>
+            <a:off x="6267621" y="3347076"/>
+            <a:ext cx="5177594" cy="3451729"/>
+          </a:xfrm>
+          <a:prstGeom prst="rect">
+            <a:avLst/>
+          </a:prstGeom>
+        </p:spPr>
+      </p:pic>
+      <p:sp>
+        <p:nvSpPr>
+          <p:cNvPr id="30" name="TextBox 29">
+            <a:extLst>
+              <a:ext uri="{FF2B5EF4-FFF2-40B4-BE49-F238E27FC236}">
+                <a16:creationId xmlns:a16="http://schemas.microsoft.com/office/drawing/2014/main" id="{C1996A3B-E381-F22C-063F-1082B672E7C4}"/>
+              </a:ext>
+            </a:extLst>
+          </p:cNvPr>
+          <p:cNvSpPr txBox="1"/>
+          <p:nvPr/>
+        </p:nvSpPr>
+        <p:spPr>
+          <a:xfrm>
+            <a:off x="7244270" y="2317539"/>
+            <a:ext cx="3030415" cy="369332"/>
+          </a:xfrm>
+          <a:prstGeom prst="rect">
+            <a:avLst/>
+          </a:prstGeom>
+          <a:noFill/>
+        </p:spPr>
+        <p:txBody>
+          <a:bodyPr wrap="square" rtlCol="0">
+            <a:spAutoFit/>
+          </a:bodyPr>
+          <a:lstStyle/>
+          <a:p>
+            <a:r>
+              <a:rPr lang="en-US" dirty="0">
+                <a:solidFill>
+                  <a:srgbClr val="FF0000"/>
+                </a:solidFill>
+              </a:rPr>
+              <a:t>Log-rank p-value &lt; 0.001**</a:t>
+            </a:r>
+          </a:p>
+        </p:txBody>
+      </p:sp>
+      <p:sp>
+        <p:nvSpPr>
+          <p:cNvPr id="31" name="TextBox 30">
+            <a:extLst>
+              <a:ext uri="{FF2B5EF4-FFF2-40B4-BE49-F238E27FC236}">
+                <a16:creationId xmlns:a16="http://schemas.microsoft.com/office/drawing/2014/main" id="{2C4E47C4-D97B-D430-6F0C-0D23428E0639}"/>
+              </a:ext>
+            </a:extLst>
+          </p:cNvPr>
+          <p:cNvSpPr txBox="1"/>
+          <p:nvPr/>
+        </p:nvSpPr>
+        <p:spPr>
+          <a:xfrm>
+            <a:off x="7244269" y="5769038"/>
+            <a:ext cx="3030415" cy="369332"/>
+          </a:xfrm>
+          <a:prstGeom prst="rect">
+            <a:avLst/>
+          </a:prstGeom>
+          <a:noFill/>
+        </p:spPr>
+        <p:txBody>
+          <a:bodyPr wrap="square" rtlCol="0">
+            <a:spAutoFit/>
+          </a:bodyPr>
+          <a:lstStyle/>
+          <a:p>
+            <a:r>
+              <a:rPr lang="en-US" dirty="0">
+                <a:solidFill>
+                  <a:srgbClr val="FF0000"/>
+                </a:solidFill>
+              </a:rPr>
+              <a:t>Log-rank p-value = 0.007**</a:t>
+            </a:r>
+          </a:p>
+        </p:txBody>
+      </p:sp>
+      <p:sp>
+        <p:nvSpPr>
+          <p:cNvPr id="10" name="TextBox 9">
+            <a:extLst>
+              <a:ext uri="{FF2B5EF4-FFF2-40B4-BE49-F238E27FC236}">
+                <a16:creationId xmlns:a16="http://schemas.microsoft.com/office/drawing/2014/main" id="{CB47145C-E6AD-EF2C-FE1F-FC2691D89E0B}"/>
+              </a:ext>
+            </a:extLst>
+          </p:cNvPr>
+          <p:cNvSpPr txBox="1"/>
+          <p:nvPr/>
+        </p:nvSpPr>
+        <p:spPr>
+          <a:xfrm>
+            <a:off x="1194456" y="2776657"/>
+            <a:ext cx="450575" cy="369332"/>
+          </a:xfrm>
+          <a:prstGeom prst="rect">
+            <a:avLst/>
+          </a:prstGeom>
+          <a:noFill/>
+        </p:spPr>
+        <p:txBody>
+          <a:bodyPr wrap="square" rtlCol="0">
+            <a:spAutoFit/>
+          </a:bodyPr>
+          <a:lstStyle/>
+          <a:p>
+            <a:r>
+              <a:rPr lang="en-US" b="1" dirty="0"/>
+              <a:t>a)</a:t>
+            </a:r>
+          </a:p>
+        </p:txBody>
+      </p:sp>
+      <p:sp>
+        <p:nvSpPr>
+          <p:cNvPr id="11" name="TextBox 10">
+            <a:extLst>
+              <a:ext uri="{FF2B5EF4-FFF2-40B4-BE49-F238E27FC236}">
+                <a16:creationId xmlns:a16="http://schemas.microsoft.com/office/drawing/2014/main" id="{C37A3CFB-99E3-4223-EB9D-4EB2CBDF89E0}"/>
+              </a:ext>
+            </a:extLst>
+          </p:cNvPr>
+          <p:cNvSpPr txBox="1"/>
+          <p:nvPr/>
+        </p:nvSpPr>
+        <p:spPr>
+          <a:xfrm>
+            <a:off x="6267621" y="2776657"/>
+            <a:ext cx="450575" cy="369332"/>
+          </a:xfrm>
+          <a:prstGeom prst="rect">
+            <a:avLst/>
+          </a:prstGeom>
+          <a:noFill/>
+        </p:spPr>
+        <p:txBody>
+          <a:bodyPr wrap="square" rtlCol="0">
+            <a:spAutoFit/>
+          </a:bodyPr>
+          <a:lstStyle/>
+          <a:p>
+            <a:r>
+              <a:rPr lang="en-US" b="1" dirty="0"/>
+              <a:t>b)</a:t>
+            </a:r>
+          </a:p>
+        </p:txBody>
+      </p:sp>
+      <p:sp>
+        <p:nvSpPr>
+          <p:cNvPr id="12" name="TextBox 11">
+            <a:extLst>
+              <a:ext uri="{FF2B5EF4-FFF2-40B4-BE49-F238E27FC236}">
+                <a16:creationId xmlns:a16="http://schemas.microsoft.com/office/drawing/2014/main" id="{7D80F403-14BE-0B53-6786-A9C3E9DF758B}"/>
+              </a:ext>
+            </a:extLst>
+          </p:cNvPr>
+          <p:cNvSpPr txBox="1"/>
+          <p:nvPr/>
+        </p:nvSpPr>
+        <p:spPr>
+          <a:xfrm>
+            <a:off x="6267621" y="6159295"/>
+            <a:ext cx="450575" cy="369332"/>
+          </a:xfrm>
+          <a:prstGeom prst="rect">
+            <a:avLst/>
+          </a:prstGeom>
+          <a:noFill/>
+        </p:spPr>
+        <p:txBody>
+          <a:bodyPr wrap="square" rtlCol="0">
+            <a:spAutoFit/>
+          </a:bodyPr>
+          <a:lstStyle/>
+          <a:p>
+            <a:r>
+              <a:rPr lang="en-US" b="1" dirty="0"/>
+              <a:t>d)</a:t>
+            </a:r>
+          </a:p>
+        </p:txBody>
+      </p:sp>
+      <p:sp>
+        <p:nvSpPr>
+          <p:cNvPr id="13" name="TextBox 12">
+            <a:extLst>
+              <a:ext uri="{FF2B5EF4-FFF2-40B4-BE49-F238E27FC236}">
+                <a16:creationId xmlns:a16="http://schemas.microsoft.com/office/drawing/2014/main" id="{1C42B1F4-DD7C-7652-2112-499D739E973B}"/>
+              </a:ext>
+            </a:extLst>
+          </p:cNvPr>
+          <p:cNvSpPr txBox="1"/>
+          <p:nvPr/>
+        </p:nvSpPr>
+        <p:spPr>
+          <a:xfrm>
+            <a:off x="1194457" y="6159295"/>
+            <a:ext cx="450575" cy="369332"/>
+          </a:xfrm>
+          <a:prstGeom prst="rect">
+            <a:avLst/>
+          </a:prstGeom>
+          <a:noFill/>
+        </p:spPr>
+        <p:txBody>
+          <a:bodyPr wrap="square" rtlCol="0">
+            <a:spAutoFit/>
+          </a:bodyPr>
+          <a:lstStyle/>
+          <a:p>
+            <a:r>
+              <a:rPr lang="en-US" b="1" dirty="0"/>
+              <a:t>c)</a:t>
+            </a:r>
+          </a:p>
+        </p:txBody>
+      </p:sp>
+    </p:spTree>
+    <p:extLst>
+      <p:ext uri="{BB962C8B-B14F-4D97-AF65-F5344CB8AC3E}">
+        <p14:creationId xmlns:p14="http://schemas.microsoft.com/office/powerpoint/2010/main" val="2954471719"/>
       </p:ext>
     </p:extLst>
   </p:cSld>
